--- a/figures/MARS_method_aligned.pptx
+++ b/figures/MARS_method_aligned.pptx
@@ -107,6 +107,11 @@
       </a:defRPr>
     </a:lvl9pPr>
   </p:defaultTextStyle>
+  <p:extLst>
+    <p:ext uri="{EFAFB233-063F-42B5-8137-9DF3F51BA10A}">
+      <p15:sldGuideLst xmlns:p15="http://schemas.microsoft.com/office/powerpoint/2012/main"/>
+    </p:ext>
+  </p:extLst>
 </p:presentation>
 </file>
 
@@ -1116,1533 +1121,1518 @@
           </p:txBody>
         </p:sp>
       </p:grpSp>
-      <p:grpSp>
-        <p:nvGrpSpPr>
-          <p:cNvPr id="360" name="Input source"/>
-          <p:cNvGrpSpPr/>
+      <p:pic>
+        <p:nvPicPr>
+          <p:cNvPr id="375" name="pytorch official logo" descr="https://raw.githubusercontent.com/pytorch/pytorch/main/docs/source/_static/img/pytorch-logo-dark.svg | Original SVG bytes; proportional crop of the official symbol."/>
+          <p:cNvPicPr>
+            <a:picLocks noChangeAspect="1"/>
+          </p:cNvPicPr>
           <p:nvPr/>
-        </p:nvGrpSpPr>
-        <p:grpSpPr>
+        </p:nvPicPr>
+        <p:blipFill>
+          <a:blip>
+            <a:extLst>
+              <a:ext uri="{96DAC541-7B7A-43D3-8B79-37D633B846F1}">
+                <asvg:svgBlip xmlns:asvg="http://schemas.microsoft.com/office/drawing/2016/SVG/main" r:embed="rId3"/>
+              </a:ext>
+            </a:extLst>
+          </a:blip>
+          <a:srcRect/>
+          <a:stretch>
+            <a:fillRect/>
+          </a:stretch>
+        </p:blipFill>
+        <p:spPr>
           <a:xfrm>
             <a:off x="231310" y="647700"/>
-            <a:ext cx="2950040" cy="5867400"/>
-            <a:chOff x="231310" y="647700"/>
-            <a:chExt cx="2950040" cy="5867400"/>
+            <a:ext cx="390525" cy="475620"/>
           </a:xfrm>
-        </p:grpSpPr>
-        <p:pic>
-          <p:nvPicPr>
-            <p:cNvPr id="375" name="pytorch official logo" descr="https://raw.githubusercontent.com/pytorch/pytorch/main/docs/source/_static/img/pytorch-logo-dark.svg | Original SVG bytes; proportional crop of the official symbol."/>
-            <p:cNvPicPr>
-              <a:picLocks noChangeAspect="1"/>
-            </p:cNvPicPr>
-            <p:nvPr/>
-          </p:nvPicPr>
-          <p:blipFill>
-            <a:blip>
-              <a:extLst>
-                <a:ext uri="{96DAC541-7B7A-43D3-8B79-37D633B846F1}">
-                  <asvg:svgBlip xmlns:asvg="http://schemas.microsoft.com/office/drawing/2016/SVG/main" r:embed="rId3"/>
-                </a:ext>
-              </a:extLst>
-            </a:blip>
-            <a:srcRect/>
-            <a:stretch>
-              <a:fillRect/>
-            </a:stretch>
-          </p:blipFill>
-          <p:spPr>
-            <a:xfrm>
-              <a:off x="231310" y="647700"/>
-              <a:ext cx="390525" cy="475620"/>
-            </a:xfrm>
-            <a:prstGeom prst="rect">
-              <a:avLst/>
-            </a:prstGeom>
-          </p:spPr>
-        </p:pic>
-        <p:sp>
-          <p:nvSpPr>
-            <p:cNvPr id="10" name="Input title">
-              <a:extLst>
-                <a:ext uri="{FF2B5EF4-FFF2-40B4-BE49-F238E27FC236}">
-                  <a16:creationId xmlns:a16="http://schemas.microsoft.com/office/drawing/2014/main" id="{AEFF93D4-57D7-4904-A9FF-6F3772C03327}"/>
-                </a:ext>
-              </a:extLst>
-            </p:cNvPr>
-            <p:cNvSpPr>
-              <a:spLocks noGrp="1"/>
-            </p:cNvSpPr>
-            <p:nvPr/>
-          </p:nvSpPr>
-          <p:spPr>
-            <a:xfrm>
-              <a:off x="745660" y="771525"/>
-              <a:ext cx="2390775" cy="352425"/>
-            </a:xfrm>
-            <a:prstGeom prst="rect">
-              <a:avLst/>
-            </a:prstGeom>
+          <a:prstGeom prst="rect">
+            <a:avLst/>
+          </a:prstGeom>
+        </p:spPr>
+      </p:pic>
+      <p:sp>
+        <p:nvSpPr>
+          <p:cNvPr id="10" name="Input title">
+            <a:extLst>
+              <a:ext uri="{FF2B5EF4-FFF2-40B4-BE49-F238E27FC236}">
+                <a16:creationId xmlns:a16="http://schemas.microsoft.com/office/drawing/2014/main" id="{AEFF93D4-57D7-4904-A9FF-6F3772C03327}"/>
+              </a:ext>
+            </a:extLst>
+          </p:cNvPr>
+          <p:cNvSpPr>
+            <a:spLocks noGrp="1"/>
+          </p:cNvSpPr>
+          <p:nvPr/>
+        </p:nvSpPr>
+        <p:spPr>
+          <a:xfrm>
+            <a:off x="745660" y="771525"/>
+            <a:ext cx="2390775" cy="352425"/>
+          </a:xfrm>
+          <a:prstGeom prst="rect">
+            <a:avLst/>
+          </a:prstGeom>
+          <a:noFill/>
+          <a:ln w="0">
             <a:noFill/>
-            <a:ln w="0">
-              <a:noFill/>
-            </a:ln>
-          </p:spPr>
-          <p:txBody>
-            <a:bodyPr wrap="none" lIns="0" tIns="0" rIns="0" bIns="0" anchor="t">
-              <a:noAutofit/>
-            </a:bodyPr>
-            <a:lstStyle/>
-            <a:p>
-              <a:pPr algn="l">
-                <a:defRPr sz="1875" b="1">
-                  <a:solidFill>
-                    <a:srgbClr val="091322"/>
-                  </a:solidFill>
-                  <a:latin typeface="Arial Narrow"/>
-                  <a:ea typeface="Arial Narrow"/>
-                  <a:cs typeface="Arial Narrow"/>
-                </a:defRPr>
-              </a:pPr>
-              <a:r>
-                <a:rPr sz="1875" b="1" dirty="0">
-                  <a:solidFill>
-                    <a:srgbClr val="091322"/>
-                  </a:solidFill>
-                  <a:latin typeface="Times New Roman" panose="02020603050405020304" pitchFamily="18" charset="0"/>
-                  <a:ea typeface="Arial Narrow"/>
-                  <a:cs typeface="Times New Roman" panose="02020603050405020304" pitchFamily="18" charset="0"/>
-                </a:rPr>
-                <a:t>Input: </a:t>
-              </a:r>
-              <a:r>
-                <a:rPr sz="1875" b="1" dirty="0" err="1">
-                  <a:solidFill>
-                    <a:srgbClr val="091322"/>
-                  </a:solidFill>
-                  <a:latin typeface="Times New Roman" panose="02020603050405020304" pitchFamily="18" charset="0"/>
-                  <a:ea typeface="Arial Narrow"/>
-                  <a:cs typeface="Times New Roman" panose="02020603050405020304" pitchFamily="18" charset="0"/>
-                </a:rPr>
-                <a:t>PyTorch</a:t>
-              </a:r>
-              <a:r>
-                <a:rPr sz="1875" b="1" dirty="0">
-                  <a:solidFill>
-                    <a:srgbClr val="091322"/>
-                  </a:solidFill>
-                  <a:latin typeface="Times New Roman" panose="02020603050405020304" pitchFamily="18" charset="0"/>
-                  <a:ea typeface="Arial Narrow"/>
-                  <a:cs typeface="Times New Roman" panose="02020603050405020304" pitchFamily="18" charset="0"/>
-                </a:rPr>
-                <a:t> Program</a:t>
-              </a:r>
-            </a:p>
-          </p:txBody>
-        </p:sp>
-        <p:sp>
-          <p:nvSpPr>
-            <p:cNvPr id="11" name="Source program card">
-              <a:extLst>
-                <a:ext uri="{FF2B5EF4-FFF2-40B4-BE49-F238E27FC236}">
-                  <a16:creationId xmlns:a16="http://schemas.microsoft.com/office/drawing/2014/main" id="{3BC0C808-11C7-47A3-8FEC-249D97D84518}"/>
-                </a:ext>
-              </a:extLst>
-            </p:cNvPr>
-            <p:cNvSpPr>
-              <a:spLocks noGrp="1"/>
-            </p:cNvSpPr>
-            <p:nvPr/>
-          </p:nvSpPr>
-          <p:spPr>
-            <a:xfrm>
-              <a:off x="304800" y="1209675"/>
-              <a:ext cx="2876550" cy="5305425"/>
-            </a:xfrm>
-            <a:prstGeom prst="roundRect">
-              <a:avLst>
-                <a:gd name="adj" fmla="val 3974"/>
-              </a:avLst>
-            </a:prstGeom>
+          </a:ln>
+        </p:spPr>
+        <p:txBody>
+          <a:bodyPr wrap="none" lIns="0" tIns="0" rIns="0" bIns="0" anchor="t">
+            <a:noAutofit/>
+          </a:bodyPr>
+          <a:lstStyle/>
+          <a:p>
+            <a:pPr algn="l">
+              <a:defRPr sz="1875" b="1">
+                <a:solidFill>
+                  <a:srgbClr val="091322"/>
+                </a:solidFill>
+                <a:latin typeface="Arial Narrow"/>
+                <a:ea typeface="Arial Narrow"/>
+                <a:cs typeface="Arial Narrow"/>
+              </a:defRPr>
+            </a:pPr>
+            <a:r>
+              <a:rPr sz="1875" b="1" dirty="0">
+                <a:solidFill>
+                  <a:srgbClr val="091322"/>
+                </a:solidFill>
+                <a:latin typeface="Times New Roman" panose="02020603050405020304" pitchFamily="18" charset="0"/>
+                <a:ea typeface="Arial Narrow"/>
+                <a:cs typeface="Times New Roman" panose="02020603050405020304" pitchFamily="18" charset="0"/>
+              </a:rPr>
+              <a:t>Input: </a:t>
+            </a:r>
+            <a:r>
+              <a:rPr sz="1875" b="1" dirty="0" err="1">
+                <a:solidFill>
+                  <a:srgbClr val="091322"/>
+                </a:solidFill>
+                <a:latin typeface="Times New Roman" panose="02020603050405020304" pitchFamily="18" charset="0"/>
+                <a:ea typeface="Arial Narrow"/>
+                <a:cs typeface="Times New Roman" panose="02020603050405020304" pitchFamily="18" charset="0"/>
+              </a:rPr>
+              <a:t>PyTorch</a:t>
+            </a:r>
+            <a:r>
+              <a:rPr sz="1875" b="1" dirty="0">
+                <a:solidFill>
+                  <a:srgbClr val="091322"/>
+                </a:solidFill>
+                <a:latin typeface="Times New Roman" panose="02020603050405020304" pitchFamily="18" charset="0"/>
+                <a:ea typeface="Arial Narrow"/>
+                <a:cs typeface="Times New Roman" panose="02020603050405020304" pitchFamily="18" charset="0"/>
+              </a:rPr>
+              <a:t> Program</a:t>
+            </a:r>
+          </a:p>
+        </p:txBody>
+      </p:sp>
+      <p:sp>
+        <p:nvSpPr>
+          <p:cNvPr id="11" name="Source program card">
+            <a:extLst>
+              <a:ext uri="{FF2B5EF4-FFF2-40B4-BE49-F238E27FC236}">
+                <a16:creationId xmlns:a16="http://schemas.microsoft.com/office/drawing/2014/main" id="{3BC0C808-11C7-47A3-8FEC-249D97D84518}"/>
+              </a:ext>
+            </a:extLst>
+          </p:cNvPr>
+          <p:cNvSpPr>
+            <a:spLocks noGrp="1"/>
+          </p:cNvSpPr>
+          <p:nvPr/>
+        </p:nvSpPr>
+        <p:spPr>
+          <a:xfrm>
+            <a:off x="304800" y="1209675"/>
+            <a:ext cx="2876550" cy="5305425"/>
+          </a:xfrm>
+          <a:prstGeom prst="roundRect">
+            <a:avLst>
+              <a:gd name="adj" fmla="val 3974"/>
+            </a:avLst>
+          </a:prstGeom>
+          <a:solidFill>
+            <a:srgbClr val="FCFEFF"/>
+          </a:solidFill>
+          <a:ln w="17145">
             <a:solidFill>
-              <a:srgbClr val="FCFEFF"/>
+              <a:srgbClr val="CDDCE7"/>
             </a:solidFill>
-            <a:ln w="17145">
-              <a:solidFill>
-                <a:srgbClr val="CDDCE7"/>
-              </a:solidFill>
-            </a:ln>
-          </p:spPr>
-        </p:sp>
-        <p:sp>
-          <p:nvSpPr>
-            <p:cNvPr id="12" name="Source program heading">
-              <a:extLst>
-                <a:ext uri="{FF2B5EF4-FFF2-40B4-BE49-F238E27FC236}">
-                  <a16:creationId xmlns:a16="http://schemas.microsoft.com/office/drawing/2014/main" id="{B7FA53B9-FA75-4FC8-BD19-D8BF27EA042B}"/>
-                </a:ext>
-              </a:extLst>
-            </p:cNvPr>
-            <p:cNvSpPr>
-              <a:spLocks noGrp="1"/>
-            </p:cNvSpPr>
-            <p:nvPr/>
-          </p:nvSpPr>
-          <p:spPr>
-            <a:xfrm>
-              <a:off x="447675" y="1295400"/>
-              <a:ext cx="2667000" cy="266700"/>
-            </a:xfrm>
-            <a:prstGeom prst="rect">
-              <a:avLst/>
-            </a:prstGeom>
+          </a:ln>
+        </p:spPr>
+      </p:sp>
+      <p:sp>
+        <p:nvSpPr>
+          <p:cNvPr id="12" name="Source program heading">
+            <a:extLst>
+              <a:ext uri="{FF2B5EF4-FFF2-40B4-BE49-F238E27FC236}">
+                <a16:creationId xmlns:a16="http://schemas.microsoft.com/office/drawing/2014/main" id="{B7FA53B9-FA75-4FC8-BD19-D8BF27EA042B}"/>
+              </a:ext>
+            </a:extLst>
+          </p:cNvPr>
+          <p:cNvSpPr>
+            <a:spLocks noGrp="1"/>
+          </p:cNvSpPr>
+          <p:nvPr/>
+        </p:nvSpPr>
+        <p:spPr>
+          <a:xfrm>
+            <a:off x="447675" y="1295400"/>
+            <a:ext cx="2667000" cy="266700"/>
+          </a:xfrm>
+          <a:prstGeom prst="rect">
+            <a:avLst/>
+          </a:prstGeom>
+          <a:noFill/>
+          <a:ln w="0">
             <a:noFill/>
-            <a:ln w="0">
-              <a:noFill/>
-            </a:ln>
-          </p:spPr>
-          <p:txBody>
-            <a:bodyPr wrap="none" lIns="0" tIns="0" rIns="0" bIns="0" anchor="t">
-              <a:noAutofit/>
-            </a:bodyPr>
-            <a:lstStyle/>
-            <a:p>
-              <a:pPr algn="l">
-                <a:defRPr sz="1575" b="1">
-                  <a:solidFill>
-                    <a:srgbClr val="091322"/>
-                  </a:solidFill>
-                  <a:latin typeface="Arial Narrow"/>
-                  <a:ea typeface="Arial Narrow"/>
-                  <a:cs typeface="Arial Narrow"/>
-                </a:defRPr>
-              </a:pPr>
-              <a:r>
-                <a:rPr sz="1575" b="1">
-                  <a:solidFill>
-                    <a:srgbClr val="091322"/>
-                  </a:solidFill>
-                  <a:latin typeface="Times New Roman" panose="02020603050405020304" pitchFamily="18" charset="0"/>
-                  <a:ea typeface="Arial Narrow"/>
-                  <a:cs typeface="Times New Roman" panose="02020603050405020304" pitchFamily="18" charset="0"/>
-                </a:rPr>
-                <a:t>Source Program (PyTorch)</a:t>
-              </a:r>
-            </a:p>
-          </p:txBody>
-        </p:sp>
-        <p:sp>
-          <p:nvSpPr>
-            <p:cNvPr id="13" name="Source code well">
-              <a:extLst>
-                <a:ext uri="{FF2B5EF4-FFF2-40B4-BE49-F238E27FC236}">
-                  <a16:creationId xmlns:a16="http://schemas.microsoft.com/office/drawing/2014/main" id="{67AAC538-6906-45B8-8A5A-A84A1107E6C5}"/>
-                </a:ext>
-              </a:extLst>
-            </p:cNvPr>
-            <p:cNvSpPr>
-              <a:spLocks noGrp="1"/>
-            </p:cNvSpPr>
-            <p:nvPr/>
-          </p:nvSpPr>
-          <p:spPr>
-            <a:xfrm>
-              <a:off x="400050" y="1562100"/>
-              <a:ext cx="2686050" cy="4838700"/>
-            </a:xfrm>
-            <a:prstGeom prst="roundRect">
-              <a:avLst>
-                <a:gd name="adj" fmla="val 3546"/>
-              </a:avLst>
-            </a:prstGeom>
-            <a:gradFill>
-              <a:gsLst>
-                <a:gs pos="0">
-                  <a:srgbClr val="F5F7F9"/>
-                </a:gs>
-                <a:gs pos="100000">
-                  <a:srgbClr val="F2F5F7"/>
-                </a:gs>
-              </a:gsLst>
-              <a:lin ang="5400000"/>
-            </a:gradFill>
-            <a:ln w="0">
-              <a:noFill/>
-            </a:ln>
-          </p:spPr>
-        </p:sp>
-        <p:sp>
-          <p:nvSpPr>
-            <p:cNvPr id="14" name="PyTorch source line 1">
-              <a:extLst>
-                <a:ext uri="{FF2B5EF4-FFF2-40B4-BE49-F238E27FC236}">
-                  <a16:creationId xmlns:a16="http://schemas.microsoft.com/office/drawing/2014/main" id="{19B7AA75-11C2-439E-B9DF-195E14B878B7}"/>
-                </a:ext>
-              </a:extLst>
-            </p:cNvPr>
-            <p:cNvSpPr>
-              <a:spLocks noGrp="1"/>
-            </p:cNvSpPr>
-            <p:nvPr/>
-          </p:nvSpPr>
-          <p:spPr>
-            <a:xfrm>
-              <a:off x="567421" y="1657350"/>
-              <a:ext cx="2581275" cy="209550"/>
-            </a:xfrm>
-            <a:prstGeom prst="rect">
-              <a:avLst/>
-            </a:prstGeom>
+          </a:ln>
+        </p:spPr>
+        <p:txBody>
+          <a:bodyPr wrap="none" lIns="0" tIns="0" rIns="0" bIns="0" anchor="t">
+            <a:noAutofit/>
+          </a:bodyPr>
+          <a:lstStyle/>
+          <a:p>
+            <a:pPr algn="l">
+              <a:defRPr sz="1575" b="1">
+                <a:solidFill>
+                  <a:srgbClr val="091322"/>
+                </a:solidFill>
+                <a:latin typeface="Arial Narrow"/>
+                <a:ea typeface="Arial Narrow"/>
+                <a:cs typeface="Arial Narrow"/>
+              </a:defRPr>
+            </a:pPr>
+            <a:r>
+              <a:rPr sz="1575" b="1">
+                <a:solidFill>
+                  <a:srgbClr val="091322"/>
+                </a:solidFill>
+                <a:latin typeface="Times New Roman" panose="02020603050405020304" pitchFamily="18" charset="0"/>
+                <a:ea typeface="Arial Narrow"/>
+                <a:cs typeface="Times New Roman" panose="02020603050405020304" pitchFamily="18" charset="0"/>
+              </a:rPr>
+              <a:t>Source Program (PyTorch)</a:t>
+            </a:r>
+          </a:p>
+        </p:txBody>
+      </p:sp>
+      <p:sp>
+        <p:nvSpPr>
+          <p:cNvPr id="13" name="Source code well">
+            <a:extLst>
+              <a:ext uri="{FF2B5EF4-FFF2-40B4-BE49-F238E27FC236}">
+                <a16:creationId xmlns:a16="http://schemas.microsoft.com/office/drawing/2014/main" id="{67AAC538-6906-45B8-8A5A-A84A1107E6C5}"/>
+              </a:ext>
+            </a:extLst>
+          </p:cNvPr>
+          <p:cNvSpPr>
+            <a:spLocks noGrp="1"/>
+          </p:cNvSpPr>
+          <p:nvPr/>
+        </p:nvSpPr>
+        <p:spPr>
+          <a:xfrm>
+            <a:off x="400050" y="1562100"/>
+            <a:ext cx="2686050" cy="4838700"/>
+          </a:xfrm>
+          <a:prstGeom prst="roundRect">
+            <a:avLst>
+              <a:gd name="adj" fmla="val 3546"/>
+            </a:avLst>
+          </a:prstGeom>
+          <a:gradFill>
+            <a:gsLst>
+              <a:gs pos="0">
+                <a:srgbClr val="F5F7F9"/>
+              </a:gs>
+              <a:gs pos="100000">
+                <a:srgbClr val="F2F5F7"/>
+              </a:gs>
+            </a:gsLst>
+            <a:lin ang="5400000"/>
+          </a:gradFill>
+          <a:ln w="0">
             <a:noFill/>
-            <a:ln w="0">
-              <a:noFill/>
-            </a:ln>
-          </p:spPr>
-          <p:txBody>
-            <a:bodyPr wrap="none" lIns="0" tIns="0" rIns="0" bIns="0" anchor="t">
-              <a:noAutofit/>
-            </a:bodyPr>
-            <a:lstStyle/>
-            <a:p>
-              <a:pPr algn="l">
-                <a:defRPr sz="1088" b="0">
-                  <a:solidFill>
-                    <a:srgbClr val="131846"/>
-                  </a:solidFill>
-                  <a:latin typeface="Consolas"/>
-                  <a:ea typeface="Consolas"/>
-                  <a:cs typeface="Consolas"/>
-                </a:defRPr>
-              </a:pPr>
-              <a:r>
-                <a:rPr dirty="0">
-                  <a:solidFill>
-                    <a:srgbClr val="C800D4"/>
-                  </a:solidFill>
-                  <a:latin typeface="Consolas" panose="020B0609020204030204" pitchFamily="49" charset="0"/>
-                  <a:cs typeface="Times New Roman" panose="02020603050405020304" pitchFamily="18" charset="0"/>
-                </a:rPr>
-                <a:t>import</a:t>
-              </a:r>
-              <a:r>
-                <a:rPr dirty="0">
-                  <a:solidFill>
-                    <a:srgbClr val="111638"/>
-                  </a:solidFill>
-                  <a:latin typeface="Consolas" panose="020B0609020204030204" pitchFamily="49" charset="0"/>
-                  <a:cs typeface="Times New Roman" panose="02020603050405020304" pitchFamily="18" charset="0"/>
-                </a:rPr>
-                <a:t> torch</a:t>
-              </a:r>
-            </a:p>
-          </p:txBody>
-        </p:sp>
-        <p:sp>
-          <p:nvSpPr>
-            <p:cNvPr id="15" name="PyTorch source line 2">
-              <a:extLst>
-                <a:ext uri="{FF2B5EF4-FFF2-40B4-BE49-F238E27FC236}">
-                  <a16:creationId xmlns:a16="http://schemas.microsoft.com/office/drawing/2014/main" id="{D260738E-9D52-4208-9E45-BBF363BAFA40}"/>
-                </a:ext>
-              </a:extLst>
-            </p:cNvPr>
-            <p:cNvSpPr>
-              <a:spLocks noGrp="1"/>
-            </p:cNvSpPr>
-            <p:nvPr/>
-          </p:nvSpPr>
-          <p:spPr>
-            <a:xfrm>
-              <a:off x="567421" y="1952625"/>
-              <a:ext cx="2581275" cy="209550"/>
-            </a:xfrm>
-            <a:prstGeom prst="rect">
-              <a:avLst/>
-            </a:prstGeom>
+          </a:ln>
+        </p:spPr>
+      </p:sp>
+      <p:sp>
+        <p:nvSpPr>
+          <p:cNvPr id="14" name="PyTorch source line 1">
+            <a:extLst>
+              <a:ext uri="{FF2B5EF4-FFF2-40B4-BE49-F238E27FC236}">
+                <a16:creationId xmlns:a16="http://schemas.microsoft.com/office/drawing/2014/main" id="{19B7AA75-11C2-439E-B9DF-195E14B878B7}"/>
+              </a:ext>
+            </a:extLst>
+          </p:cNvPr>
+          <p:cNvSpPr>
+            <a:spLocks noGrp="1"/>
+          </p:cNvSpPr>
+          <p:nvPr/>
+        </p:nvSpPr>
+        <p:spPr>
+          <a:xfrm>
+            <a:off x="567421" y="1657350"/>
+            <a:ext cx="2581275" cy="209550"/>
+          </a:xfrm>
+          <a:prstGeom prst="rect">
+            <a:avLst/>
+          </a:prstGeom>
+          <a:noFill/>
+          <a:ln w="0">
             <a:noFill/>
-            <a:ln w="0">
-              <a:noFill/>
-            </a:ln>
-          </p:spPr>
-          <p:txBody>
-            <a:bodyPr wrap="none" lIns="0" tIns="0" rIns="0" bIns="0" anchor="t">
-              <a:noAutofit/>
-            </a:bodyPr>
-            <a:lstStyle/>
-            <a:p>
-              <a:pPr algn="l">
-                <a:defRPr sz="1088" b="0">
-                  <a:solidFill>
-                    <a:srgbClr val="131846"/>
-                  </a:solidFill>
-                  <a:latin typeface="Consolas"/>
-                  <a:ea typeface="Consolas"/>
-                  <a:cs typeface="Consolas"/>
-                </a:defRPr>
-              </a:pPr>
-              <a:r>
-                <a:rPr dirty="0">
-                  <a:solidFill>
-                    <a:srgbClr val="C800D4"/>
-                  </a:solidFill>
-                  <a:latin typeface="Consolas" panose="020B0609020204030204" pitchFamily="49" charset="0"/>
-                  <a:cs typeface="Times New Roman" panose="02020603050405020304" pitchFamily="18" charset="0"/>
-                </a:rPr>
-                <a:t>import</a:t>
-              </a:r>
-              <a:r>
-                <a:rPr dirty="0">
-                  <a:solidFill>
-                    <a:srgbClr val="111638"/>
-                  </a:solidFill>
-                  <a:latin typeface="Consolas" panose="020B0609020204030204" pitchFamily="49" charset="0"/>
-                  <a:cs typeface="Times New Roman" panose="02020603050405020304" pitchFamily="18" charset="0"/>
-                </a:rPr>
-                <a:t> </a:t>
-              </a:r>
-              <a:r>
-                <a:rPr dirty="0" err="1">
-                  <a:solidFill>
-                    <a:srgbClr val="111638"/>
-                  </a:solidFill>
-                  <a:latin typeface="Consolas" panose="020B0609020204030204" pitchFamily="49" charset="0"/>
-                  <a:cs typeface="Times New Roman" panose="02020603050405020304" pitchFamily="18" charset="0"/>
-                </a:rPr>
-                <a:t>torch.nn</a:t>
-              </a:r>
-              <a:r>
-                <a:rPr dirty="0">
-                  <a:solidFill>
-                    <a:srgbClr val="111638"/>
-                  </a:solidFill>
-                  <a:latin typeface="Consolas" panose="020B0609020204030204" pitchFamily="49" charset="0"/>
-                  <a:cs typeface="Times New Roman" panose="02020603050405020304" pitchFamily="18" charset="0"/>
-                </a:rPr>
-                <a:t> </a:t>
-              </a:r>
-              <a:r>
-                <a:rPr dirty="0">
-                  <a:solidFill>
-                    <a:srgbClr val="C800D4"/>
-                  </a:solidFill>
-                  <a:latin typeface="Consolas" panose="020B0609020204030204" pitchFamily="49" charset="0"/>
-                  <a:cs typeface="Times New Roman" panose="02020603050405020304" pitchFamily="18" charset="0"/>
-                </a:rPr>
-                <a:t>as</a:t>
-              </a:r>
-              <a:r>
-                <a:rPr dirty="0">
-                  <a:solidFill>
-                    <a:srgbClr val="111638"/>
-                  </a:solidFill>
-                  <a:latin typeface="Consolas" panose="020B0609020204030204" pitchFamily="49" charset="0"/>
-                  <a:cs typeface="Times New Roman" panose="02020603050405020304" pitchFamily="18" charset="0"/>
-                </a:rPr>
-                <a:t> </a:t>
-              </a:r>
-              <a:r>
-                <a:rPr dirty="0" err="1">
-                  <a:solidFill>
-                    <a:srgbClr val="111638"/>
-                  </a:solidFill>
-                  <a:latin typeface="Consolas" panose="020B0609020204030204" pitchFamily="49" charset="0"/>
-                  <a:cs typeface="Times New Roman" panose="02020603050405020304" pitchFamily="18" charset="0"/>
-                </a:rPr>
-                <a:t>nn</a:t>
-              </a:r>
-              <a:endParaRPr dirty="0">
+          </a:ln>
+        </p:spPr>
+        <p:txBody>
+          <a:bodyPr wrap="none" lIns="0" tIns="0" rIns="0" bIns="0" anchor="t">
+            <a:noAutofit/>
+          </a:bodyPr>
+          <a:lstStyle/>
+          <a:p>
+            <a:pPr algn="l">
+              <a:defRPr sz="1088" b="0">
+                <a:solidFill>
+                  <a:srgbClr val="131846"/>
+                </a:solidFill>
+                <a:latin typeface="Consolas"/>
+                <a:ea typeface="Consolas"/>
+                <a:cs typeface="Consolas"/>
+              </a:defRPr>
+            </a:pPr>
+            <a:r>
+              <a:rPr dirty="0">
+                <a:solidFill>
+                  <a:srgbClr val="C800D4"/>
+                </a:solidFill>
+                <a:latin typeface="Consolas" panose="020B0609020204030204" pitchFamily="49" charset="0"/>
+                <a:cs typeface="Times New Roman" panose="02020603050405020304" pitchFamily="18" charset="0"/>
+              </a:rPr>
+              <a:t>import</a:t>
+            </a:r>
+            <a:r>
+              <a:rPr dirty="0">
                 <a:solidFill>
                   <a:srgbClr val="111638"/>
                 </a:solidFill>
                 <a:latin typeface="Consolas" panose="020B0609020204030204" pitchFamily="49" charset="0"/>
                 <a:cs typeface="Times New Roman" panose="02020603050405020304" pitchFamily="18" charset="0"/>
-              </a:endParaRPr>
-            </a:p>
-          </p:txBody>
-        </p:sp>
-        <p:sp>
-          <p:nvSpPr>
-            <p:cNvPr id="16" name="PyTorch source line 3">
-              <a:extLst>
-                <a:ext uri="{FF2B5EF4-FFF2-40B4-BE49-F238E27FC236}">
-                  <a16:creationId xmlns:a16="http://schemas.microsoft.com/office/drawing/2014/main" id="{F2A50BB8-CB3C-46A9-8F61-1F56EC5EED2D}"/>
-                </a:ext>
-              </a:extLst>
-            </p:cNvPr>
-            <p:cNvSpPr>
-              <a:spLocks noGrp="1"/>
-            </p:cNvSpPr>
-            <p:nvPr/>
-          </p:nvSpPr>
-          <p:spPr>
-            <a:xfrm>
-              <a:off x="523875" y="2247900"/>
-              <a:ext cx="2581275" cy="209550"/>
-            </a:xfrm>
-            <a:prstGeom prst="rect">
-              <a:avLst/>
-            </a:prstGeom>
+              </a:rPr>
+              <a:t> torch</a:t>
+            </a:r>
+          </a:p>
+        </p:txBody>
+      </p:sp>
+      <p:sp>
+        <p:nvSpPr>
+          <p:cNvPr id="15" name="PyTorch source line 2">
+            <a:extLst>
+              <a:ext uri="{FF2B5EF4-FFF2-40B4-BE49-F238E27FC236}">
+                <a16:creationId xmlns:a16="http://schemas.microsoft.com/office/drawing/2014/main" id="{D260738E-9D52-4208-9E45-BBF363BAFA40}"/>
+              </a:ext>
+            </a:extLst>
+          </p:cNvPr>
+          <p:cNvSpPr>
+            <a:spLocks noGrp="1"/>
+          </p:cNvSpPr>
+          <p:nvPr/>
+        </p:nvSpPr>
+        <p:spPr>
+          <a:xfrm>
+            <a:off x="567421" y="1952625"/>
+            <a:ext cx="2581275" cy="209550"/>
+          </a:xfrm>
+          <a:prstGeom prst="rect">
+            <a:avLst/>
+          </a:prstGeom>
+          <a:noFill/>
+          <a:ln w="0">
             <a:noFill/>
-            <a:ln w="0">
-              <a:noFill/>
-            </a:ln>
-          </p:spPr>
-          <p:txBody>
-            <a:bodyPr wrap="none" lIns="0" tIns="0" rIns="0" bIns="0" anchor="t">
-              <a:noAutofit/>
-            </a:bodyPr>
-            <a:lstStyle/>
-            <a:p>
-              <a:pPr algn="l">
-                <a:defRPr sz="1088" b="0">
-                  <a:solidFill>
-                    <a:srgbClr val="131846"/>
-                  </a:solidFill>
-                  <a:latin typeface="Consolas"/>
-                  <a:ea typeface="Consolas"/>
-                  <a:cs typeface="Consolas"/>
-                </a:defRPr>
-              </a:pPr>
-              <a:endParaRPr>
-                <a:latin typeface="Times New Roman" panose="02020603050405020304" pitchFamily="18" charset="0"/>
+          </a:ln>
+        </p:spPr>
+        <p:txBody>
+          <a:bodyPr wrap="none" lIns="0" tIns="0" rIns="0" bIns="0" anchor="t">
+            <a:noAutofit/>
+          </a:bodyPr>
+          <a:lstStyle/>
+          <a:p>
+            <a:pPr algn="l">
+              <a:defRPr sz="1088" b="0">
+                <a:solidFill>
+                  <a:srgbClr val="131846"/>
+                </a:solidFill>
+                <a:latin typeface="Consolas"/>
+                <a:ea typeface="Consolas"/>
+                <a:cs typeface="Consolas"/>
+              </a:defRPr>
+            </a:pPr>
+            <a:r>
+              <a:rPr dirty="0">
+                <a:solidFill>
+                  <a:srgbClr val="C800D4"/>
+                </a:solidFill>
+                <a:latin typeface="Consolas" panose="020B0609020204030204" pitchFamily="49" charset="0"/>
                 <a:cs typeface="Times New Roman" panose="02020603050405020304" pitchFamily="18" charset="0"/>
-              </a:endParaRPr>
-            </a:p>
-          </p:txBody>
-        </p:sp>
-        <p:sp>
-          <p:nvSpPr>
-            <p:cNvPr id="17" name="PyTorch source line 4">
-              <a:extLst>
-                <a:ext uri="{FF2B5EF4-FFF2-40B4-BE49-F238E27FC236}">
-                  <a16:creationId xmlns:a16="http://schemas.microsoft.com/office/drawing/2014/main" id="{0C85FFFE-87AB-438C-BFFF-4EC72B5E94CC}"/>
-                </a:ext>
-              </a:extLst>
-            </p:cNvPr>
-            <p:cNvSpPr>
-              <a:spLocks noGrp="1"/>
-            </p:cNvSpPr>
-            <p:nvPr/>
-          </p:nvSpPr>
-          <p:spPr>
-            <a:xfrm>
-              <a:off x="567421" y="2543175"/>
-              <a:ext cx="2581275" cy="209550"/>
-            </a:xfrm>
-            <a:prstGeom prst="rect">
-              <a:avLst/>
-            </a:prstGeom>
+              </a:rPr>
+              <a:t>import</a:t>
+            </a:r>
+            <a:r>
+              <a:rPr dirty="0">
+                <a:solidFill>
+                  <a:srgbClr val="111638"/>
+                </a:solidFill>
+                <a:latin typeface="Consolas" panose="020B0609020204030204" pitchFamily="49" charset="0"/>
+                <a:cs typeface="Times New Roman" panose="02020603050405020304" pitchFamily="18" charset="0"/>
+              </a:rPr>
+              <a:t> </a:t>
+            </a:r>
+            <a:r>
+              <a:rPr dirty="0" err="1">
+                <a:solidFill>
+                  <a:srgbClr val="111638"/>
+                </a:solidFill>
+                <a:latin typeface="Consolas" panose="020B0609020204030204" pitchFamily="49" charset="0"/>
+                <a:cs typeface="Times New Roman" panose="02020603050405020304" pitchFamily="18" charset="0"/>
+              </a:rPr>
+              <a:t>torch.nn</a:t>
+            </a:r>
+            <a:r>
+              <a:rPr dirty="0">
+                <a:solidFill>
+                  <a:srgbClr val="111638"/>
+                </a:solidFill>
+                <a:latin typeface="Consolas" panose="020B0609020204030204" pitchFamily="49" charset="0"/>
+                <a:cs typeface="Times New Roman" panose="02020603050405020304" pitchFamily="18" charset="0"/>
+              </a:rPr>
+              <a:t> </a:t>
+            </a:r>
+            <a:r>
+              <a:rPr dirty="0">
+                <a:solidFill>
+                  <a:srgbClr val="C800D4"/>
+                </a:solidFill>
+                <a:latin typeface="Consolas" panose="020B0609020204030204" pitchFamily="49" charset="0"/>
+                <a:cs typeface="Times New Roman" panose="02020603050405020304" pitchFamily="18" charset="0"/>
+              </a:rPr>
+              <a:t>as</a:t>
+            </a:r>
+            <a:r>
+              <a:rPr dirty="0">
+                <a:solidFill>
+                  <a:srgbClr val="111638"/>
+                </a:solidFill>
+                <a:latin typeface="Consolas" panose="020B0609020204030204" pitchFamily="49" charset="0"/>
+                <a:cs typeface="Times New Roman" panose="02020603050405020304" pitchFamily="18" charset="0"/>
+              </a:rPr>
+              <a:t> </a:t>
+            </a:r>
+            <a:r>
+              <a:rPr dirty="0" err="1">
+                <a:solidFill>
+                  <a:srgbClr val="111638"/>
+                </a:solidFill>
+                <a:latin typeface="Consolas" panose="020B0609020204030204" pitchFamily="49" charset="0"/>
+                <a:cs typeface="Times New Roman" panose="02020603050405020304" pitchFamily="18" charset="0"/>
+              </a:rPr>
+              <a:t>nn</a:t>
+            </a:r>
+            <a:endParaRPr dirty="0">
+              <a:solidFill>
+                <a:srgbClr val="111638"/>
+              </a:solidFill>
+              <a:latin typeface="Consolas" panose="020B0609020204030204" pitchFamily="49" charset="0"/>
+              <a:cs typeface="Times New Roman" panose="02020603050405020304" pitchFamily="18" charset="0"/>
+            </a:endParaRPr>
+          </a:p>
+        </p:txBody>
+      </p:sp>
+      <p:sp>
+        <p:nvSpPr>
+          <p:cNvPr id="16" name="PyTorch source line 3">
+            <a:extLst>
+              <a:ext uri="{FF2B5EF4-FFF2-40B4-BE49-F238E27FC236}">
+                <a16:creationId xmlns:a16="http://schemas.microsoft.com/office/drawing/2014/main" id="{F2A50BB8-CB3C-46A9-8F61-1F56EC5EED2D}"/>
+              </a:ext>
+            </a:extLst>
+          </p:cNvPr>
+          <p:cNvSpPr>
+            <a:spLocks noGrp="1"/>
+          </p:cNvSpPr>
+          <p:nvPr/>
+        </p:nvSpPr>
+        <p:spPr>
+          <a:xfrm>
+            <a:off x="523875" y="2247900"/>
+            <a:ext cx="2581275" cy="209550"/>
+          </a:xfrm>
+          <a:prstGeom prst="rect">
+            <a:avLst/>
+          </a:prstGeom>
+          <a:noFill/>
+          <a:ln w="0">
             <a:noFill/>
-            <a:ln w="0">
-              <a:noFill/>
-            </a:ln>
-          </p:spPr>
-          <p:txBody>
-            <a:bodyPr wrap="none" lIns="0" tIns="0" rIns="0" bIns="0" anchor="t">
-              <a:noAutofit/>
-            </a:bodyPr>
-            <a:lstStyle/>
-            <a:p>
-              <a:pPr algn="l">
-                <a:defRPr sz="1088" b="0">
-                  <a:solidFill>
-                    <a:srgbClr val="131846"/>
-                  </a:solidFill>
-                  <a:latin typeface="Consolas"/>
-                  <a:ea typeface="Consolas"/>
-                  <a:cs typeface="Consolas"/>
-                </a:defRPr>
-              </a:pPr>
-              <a:r>
-                <a:rPr>
-                  <a:solidFill>
-                    <a:srgbClr val="C800D4"/>
-                  </a:solidFill>
-                  <a:latin typeface="Consolas" panose="020B0609020204030204" pitchFamily="49" charset="0"/>
-                  <a:cs typeface="Times New Roman" panose="02020603050405020304" pitchFamily="18" charset="0"/>
-                </a:rPr>
-                <a:t>class</a:t>
-              </a:r>
-              <a:r>
-                <a:rPr>
-                  <a:solidFill>
-                    <a:srgbClr val="111638"/>
-                  </a:solidFill>
-                  <a:latin typeface="Consolas" panose="020B0609020204030204" pitchFamily="49" charset="0"/>
-                  <a:cs typeface="Times New Roman" panose="02020603050405020304" pitchFamily="18" charset="0"/>
-                </a:rPr>
-                <a:t> </a:t>
-              </a:r>
-              <a:r>
-                <a:rPr>
-                  <a:solidFill>
-                    <a:srgbClr val="005BDE"/>
-                  </a:solidFill>
-                  <a:latin typeface="Consolas" panose="020B0609020204030204" pitchFamily="49" charset="0"/>
-                  <a:cs typeface="Times New Roman" panose="02020603050405020304" pitchFamily="18" charset="0"/>
-                </a:rPr>
-                <a:t>Net</a:t>
-              </a:r>
-              <a:r>
-                <a:rPr>
-                  <a:solidFill>
-                    <a:srgbClr val="111638"/>
-                  </a:solidFill>
-                  <a:latin typeface="Consolas" panose="020B0609020204030204" pitchFamily="49" charset="0"/>
-                  <a:cs typeface="Times New Roman" panose="02020603050405020304" pitchFamily="18" charset="0"/>
-                </a:rPr>
-                <a:t>(nn.Module):</a:t>
-              </a:r>
-            </a:p>
-          </p:txBody>
-        </p:sp>
-        <p:sp>
-          <p:nvSpPr>
-            <p:cNvPr id="18" name="PyTorch source line 5">
-              <a:extLst>
-                <a:ext uri="{FF2B5EF4-FFF2-40B4-BE49-F238E27FC236}">
-                  <a16:creationId xmlns:a16="http://schemas.microsoft.com/office/drawing/2014/main" id="{AC39078F-DF64-4E59-82E3-0957DC4CA180}"/>
-                </a:ext>
-              </a:extLst>
-            </p:cNvPr>
-            <p:cNvSpPr>
-              <a:spLocks noGrp="1"/>
-            </p:cNvSpPr>
-            <p:nvPr/>
-          </p:nvSpPr>
-          <p:spPr>
-            <a:xfrm>
-              <a:off x="567421" y="2838450"/>
-              <a:ext cx="2581275" cy="209550"/>
-            </a:xfrm>
-            <a:prstGeom prst="rect">
-              <a:avLst/>
-            </a:prstGeom>
+          </a:ln>
+        </p:spPr>
+        <p:txBody>
+          <a:bodyPr wrap="none" lIns="0" tIns="0" rIns="0" bIns="0" anchor="t">
+            <a:noAutofit/>
+          </a:bodyPr>
+          <a:lstStyle/>
+          <a:p>
+            <a:pPr algn="l">
+              <a:defRPr sz="1088" b="0">
+                <a:solidFill>
+                  <a:srgbClr val="131846"/>
+                </a:solidFill>
+                <a:latin typeface="Consolas"/>
+                <a:ea typeface="Consolas"/>
+                <a:cs typeface="Consolas"/>
+              </a:defRPr>
+            </a:pPr>
+            <a:endParaRPr>
+              <a:latin typeface="Times New Roman" panose="02020603050405020304" pitchFamily="18" charset="0"/>
+              <a:cs typeface="Times New Roman" panose="02020603050405020304" pitchFamily="18" charset="0"/>
+            </a:endParaRPr>
+          </a:p>
+        </p:txBody>
+      </p:sp>
+      <p:sp>
+        <p:nvSpPr>
+          <p:cNvPr id="17" name="PyTorch source line 4">
+            <a:extLst>
+              <a:ext uri="{FF2B5EF4-FFF2-40B4-BE49-F238E27FC236}">
+                <a16:creationId xmlns:a16="http://schemas.microsoft.com/office/drawing/2014/main" id="{0C85FFFE-87AB-438C-BFFF-4EC72B5E94CC}"/>
+              </a:ext>
+            </a:extLst>
+          </p:cNvPr>
+          <p:cNvSpPr>
+            <a:spLocks noGrp="1"/>
+          </p:cNvSpPr>
+          <p:nvPr/>
+        </p:nvSpPr>
+        <p:spPr>
+          <a:xfrm>
+            <a:off x="567421" y="2543175"/>
+            <a:ext cx="2581275" cy="209550"/>
+          </a:xfrm>
+          <a:prstGeom prst="rect">
+            <a:avLst/>
+          </a:prstGeom>
+          <a:noFill/>
+          <a:ln w="0">
             <a:noFill/>
-            <a:ln w="0">
-              <a:noFill/>
-            </a:ln>
-          </p:spPr>
-          <p:txBody>
-            <a:bodyPr wrap="none" lIns="0" tIns="0" rIns="0" bIns="0" anchor="t">
-              <a:noAutofit/>
-            </a:bodyPr>
-            <a:lstStyle/>
-            <a:p>
-              <a:pPr algn="l">
-                <a:defRPr sz="1088" b="0">
-                  <a:solidFill>
-                    <a:srgbClr val="131846"/>
-                  </a:solidFill>
-                  <a:latin typeface="Consolas"/>
-                  <a:ea typeface="Consolas"/>
-                  <a:cs typeface="Consolas"/>
-                </a:defRPr>
-              </a:pPr>
-              <a:r>
-                <a:rPr>
-                  <a:solidFill>
-                    <a:srgbClr val="111638"/>
-                  </a:solidFill>
-                  <a:latin typeface="Consolas" panose="020B0609020204030204" pitchFamily="49" charset="0"/>
-                  <a:cs typeface="Times New Roman" panose="02020603050405020304" pitchFamily="18" charset="0"/>
-                </a:rPr>
-                <a:t>  </a:t>
-              </a:r>
-              <a:r>
-                <a:rPr>
-                  <a:solidFill>
-                    <a:srgbClr val="C800D4"/>
-                  </a:solidFill>
-                  <a:latin typeface="Consolas" panose="020B0609020204030204" pitchFamily="49" charset="0"/>
-                  <a:cs typeface="Times New Roman" panose="02020603050405020304" pitchFamily="18" charset="0"/>
-                </a:rPr>
-                <a:t>def</a:t>
-              </a:r>
-              <a:r>
-                <a:rPr>
-                  <a:solidFill>
-                    <a:srgbClr val="111638"/>
-                  </a:solidFill>
-                  <a:latin typeface="Consolas" panose="020B0609020204030204" pitchFamily="49" charset="0"/>
-                  <a:cs typeface="Times New Roman" panose="02020603050405020304" pitchFamily="18" charset="0"/>
-                </a:rPr>
-                <a:t> __init__(</a:t>
-              </a:r>
-              <a:r>
-                <a:rPr>
-                  <a:solidFill>
-                    <a:srgbClr val="005BDE"/>
-                  </a:solidFill>
-                  <a:latin typeface="Consolas" panose="020B0609020204030204" pitchFamily="49" charset="0"/>
-                  <a:cs typeface="Times New Roman" panose="02020603050405020304" pitchFamily="18" charset="0"/>
-                </a:rPr>
-                <a:t>self</a:t>
-              </a:r>
-              <a:r>
-                <a:rPr>
-                  <a:solidFill>
-                    <a:srgbClr val="111638"/>
-                  </a:solidFill>
-                  <a:latin typeface="Consolas" panose="020B0609020204030204" pitchFamily="49" charset="0"/>
-                  <a:cs typeface="Times New Roman" panose="02020603050405020304" pitchFamily="18" charset="0"/>
-                </a:rPr>
-                <a:t>):</a:t>
-              </a:r>
-            </a:p>
-          </p:txBody>
-        </p:sp>
-        <p:sp>
-          <p:nvSpPr>
-            <p:cNvPr id="19" name="PyTorch source line 6">
-              <a:extLst>
-                <a:ext uri="{FF2B5EF4-FFF2-40B4-BE49-F238E27FC236}">
-                  <a16:creationId xmlns:a16="http://schemas.microsoft.com/office/drawing/2014/main" id="{6D3C340C-6713-4EF5-8460-58FE03BC17D7}"/>
-                </a:ext>
-              </a:extLst>
-            </p:cNvPr>
-            <p:cNvSpPr>
-              <a:spLocks noGrp="1"/>
-            </p:cNvSpPr>
-            <p:nvPr/>
-          </p:nvSpPr>
-          <p:spPr>
-            <a:xfrm>
-              <a:off x="567421" y="3133725"/>
-              <a:ext cx="2581275" cy="209550"/>
-            </a:xfrm>
-            <a:prstGeom prst="rect">
-              <a:avLst/>
-            </a:prstGeom>
+          </a:ln>
+        </p:spPr>
+        <p:txBody>
+          <a:bodyPr wrap="none" lIns="0" tIns="0" rIns="0" bIns="0" anchor="t">
+            <a:noAutofit/>
+          </a:bodyPr>
+          <a:lstStyle/>
+          <a:p>
+            <a:pPr algn="l">
+              <a:defRPr sz="1088" b="0">
+                <a:solidFill>
+                  <a:srgbClr val="131846"/>
+                </a:solidFill>
+                <a:latin typeface="Consolas"/>
+                <a:ea typeface="Consolas"/>
+                <a:cs typeface="Consolas"/>
+              </a:defRPr>
+            </a:pPr>
+            <a:r>
+              <a:rPr>
+                <a:solidFill>
+                  <a:srgbClr val="C800D4"/>
+                </a:solidFill>
+                <a:latin typeface="Consolas" panose="020B0609020204030204" pitchFamily="49" charset="0"/>
+                <a:cs typeface="Times New Roman" panose="02020603050405020304" pitchFamily="18" charset="0"/>
+              </a:rPr>
+              <a:t>class</a:t>
+            </a:r>
+            <a:r>
+              <a:rPr>
+                <a:solidFill>
+                  <a:srgbClr val="111638"/>
+                </a:solidFill>
+                <a:latin typeface="Consolas" panose="020B0609020204030204" pitchFamily="49" charset="0"/>
+                <a:cs typeface="Times New Roman" panose="02020603050405020304" pitchFamily="18" charset="0"/>
+              </a:rPr>
+              <a:t> </a:t>
+            </a:r>
+            <a:r>
+              <a:rPr>
+                <a:solidFill>
+                  <a:srgbClr val="005BDE"/>
+                </a:solidFill>
+                <a:latin typeface="Consolas" panose="020B0609020204030204" pitchFamily="49" charset="0"/>
+                <a:cs typeface="Times New Roman" panose="02020603050405020304" pitchFamily="18" charset="0"/>
+              </a:rPr>
+              <a:t>Net</a:t>
+            </a:r>
+            <a:r>
+              <a:rPr>
+                <a:solidFill>
+                  <a:srgbClr val="111638"/>
+                </a:solidFill>
+                <a:latin typeface="Consolas" panose="020B0609020204030204" pitchFamily="49" charset="0"/>
+                <a:cs typeface="Times New Roman" panose="02020603050405020304" pitchFamily="18" charset="0"/>
+              </a:rPr>
+              <a:t>(nn.Module):</a:t>
+            </a:r>
+          </a:p>
+        </p:txBody>
+      </p:sp>
+      <p:sp>
+        <p:nvSpPr>
+          <p:cNvPr id="18" name="PyTorch source line 5">
+            <a:extLst>
+              <a:ext uri="{FF2B5EF4-FFF2-40B4-BE49-F238E27FC236}">
+                <a16:creationId xmlns:a16="http://schemas.microsoft.com/office/drawing/2014/main" id="{AC39078F-DF64-4E59-82E3-0957DC4CA180}"/>
+              </a:ext>
+            </a:extLst>
+          </p:cNvPr>
+          <p:cNvSpPr>
+            <a:spLocks noGrp="1"/>
+          </p:cNvSpPr>
+          <p:nvPr/>
+        </p:nvSpPr>
+        <p:spPr>
+          <a:xfrm>
+            <a:off x="567421" y="2838450"/>
+            <a:ext cx="2581275" cy="209550"/>
+          </a:xfrm>
+          <a:prstGeom prst="rect">
+            <a:avLst/>
+          </a:prstGeom>
+          <a:noFill/>
+          <a:ln w="0">
             <a:noFill/>
-            <a:ln w="0">
-              <a:noFill/>
-            </a:ln>
-          </p:spPr>
-          <p:txBody>
-            <a:bodyPr wrap="none" lIns="0" tIns="0" rIns="0" bIns="0" anchor="t">
-              <a:noAutofit/>
-            </a:bodyPr>
-            <a:lstStyle/>
-            <a:p>
-              <a:pPr algn="l">
-                <a:defRPr sz="1088" b="0">
-                  <a:solidFill>
-                    <a:srgbClr val="131846"/>
-                  </a:solidFill>
-                  <a:latin typeface="Consolas"/>
-                  <a:ea typeface="Consolas"/>
-                  <a:cs typeface="Consolas"/>
-                </a:defRPr>
-              </a:pPr>
-              <a:r>
-                <a:rPr dirty="0">
-                  <a:solidFill>
-                    <a:srgbClr val="111638"/>
-                  </a:solidFill>
-                  <a:latin typeface="Consolas" panose="020B0609020204030204" pitchFamily="49" charset="0"/>
-                  <a:cs typeface="Times New Roman" panose="02020603050405020304" pitchFamily="18" charset="0"/>
-                </a:rPr>
-                <a:t>    </a:t>
-              </a:r>
-              <a:r>
-                <a:rPr dirty="0">
-                  <a:solidFill>
-                    <a:srgbClr val="005BDE"/>
-                  </a:solidFill>
-                  <a:latin typeface="Consolas" panose="020B0609020204030204" pitchFamily="49" charset="0"/>
-                  <a:cs typeface="Times New Roman" panose="02020603050405020304" pitchFamily="18" charset="0"/>
-                </a:rPr>
-                <a:t>super</a:t>
-              </a:r>
-              <a:r>
-                <a:rPr dirty="0">
-                  <a:solidFill>
-                    <a:srgbClr val="111638"/>
-                  </a:solidFill>
-                  <a:latin typeface="Consolas" panose="020B0609020204030204" pitchFamily="49" charset="0"/>
-                  <a:cs typeface="Times New Roman" panose="02020603050405020304" pitchFamily="18" charset="0"/>
-                </a:rPr>
-                <a:t>().__</a:t>
-              </a:r>
-              <a:r>
-                <a:rPr dirty="0" err="1">
-                  <a:solidFill>
-                    <a:srgbClr val="111638"/>
-                  </a:solidFill>
-                  <a:latin typeface="Consolas" panose="020B0609020204030204" pitchFamily="49" charset="0"/>
-                  <a:cs typeface="Times New Roman" panose="02020603050405020304" pitchFamily="18" charset="0"/>
-                </a:rPr>
-                <a:t>init</a:t>
-              </a:r>
-              <a:r>
-                <a:rPr dirty="0">
-                  <a:solidFill>
-                    <a:srgbClr val="111638"/>
-                  </a:solidFill>
-                  <a:latin typeface="Consolas" panose="020B0609020204030204" pitchFamily="49" charset="0"/>
-                  <a:cs typeface="Times New Roman" panose="02020603050405020304" pitchFamily="18" charset="0"/>
-                </a:rPr>
-                <a:t>__()</a:t>
-              </a:r>
-            </a:p>
-          </p:txBody>
-        </p:sp>
-        <p:sp>
-          <p:nvSpPr>
-            <p:cNvPr id="20" name="PyTorch source line 7">
-              <a:extLst>
-                <a:ext uri="{FF2B5EF4-FFF2-40B4-BE49-F238E27FC236}">
-                  <a16:creationId xmlns:a16="http://schemas.microsoft.com/office/drawing/2014/main" id="{462C9EE7-A2DE-4DA9-97C4-0C5631B993E5}"/>
-                </a:ext>
-              </a:extLst>
-            </p:cNvPr>
-            <p:cNvSpPr>
-              <a:spLocks noGrp="1"/>
-            </p:cNvSpPr>
-            <p:nvPr/>
-          </p:nvSpPr>
-          <p:spPr>
-            <a:xfrm>
-              <a:off x="567421" y="3429000"/>
-              <a:ext cx="2581275" cy="209550"/>
-            </a:xfrm>
-            <a:prstGeom prst="rect">
-              <a:avLst/>
-            </a:prstGeom>
+          </a:ln>
+        </p:spPr>
+        <p:txBody>
+          <a:bodyPr wrap="none" lIns="0" tIns="0" rIns="0" bIns="0" anchor="t">
+            <a:noAutofit/>
+          </a:bodyPr>
+          <a:lstStyle/>
+          <a:p>
+            <a:pPr algn="l">
+              <a:defRPr sz="1088" b="0">
+                <a:solidFill>
+                  <a:srgbClr val="131846"/>
+                </a:solidFill>
+                <a:latin typeface="Consolas"/>
+                <a:ea typeface="Consolas"/>
+                <a:cs typeface="Consolas"/>
+              </a:defRPr>
+            </a:pPr>
+            <a:r>
+              <a:rPr>
+                <a:solidFill>
+                  <a:srgbClr val="111638"/>
+                </a:solidFill>
+                <a:latin typeface="Consolas" panose="020B0609020204030204" pitchFamily="49" charset="0"/>
+                <a:cs typeface="Times New Roman" panose="02020603050405020304" pitchFamily="18" charset="0"/>
+              </a:rPr>
+              <a:t>  </a:t>
+            </a:r>
+            <a:r>
+              <a:rPr>
+                <a:solidFill>
+                  <a:srgbClr val="C800D4"/>
+                </a:solidFill>
+                <a:latin typeface="Consolas" panose="020B0609020204030204" pitchFamily="49" charset="0"/>
+                <a:cs typeface="Times New Roman" panose="02020603050405020304" pitchFamily="18" charset="0"/>
+              </a:rPr>
+              <a:t>def</a:t>
+            </a:r>
+            <a:r>
+              <a:rPr>
+                <a:solidFill>
+                  <a:srgbClr val="111638"/>
+                </a:solidFill>
+                <a:latin typeface="Consolas" panose="020B0609020204030204" pitchFamily="49" charset="0"/>
+                <a:cs typeface="Times New Roman" panose="02020603050405020304" pitchFamily="18" charset="0"/>
+              </a:rPr>
+              <a:t> __init__(</a:t>
+            </a:r>
+            <a:r>
+              <a:rPr>
+                <a:solidFill>
+                  <a:srgbClr val="005BDE"/>
+                </a:solidFill>
+                <a:latin typeface="Consolas" panose="020B0609020204030204" pitchFamily="49" charset="0"/>
+                <a:cs typeface="Times New Roman" panose="02020603050405020304" pitchFamily="18" charset="0"/>
+              </a:rPr>
+              <a:t>self</a:t>
+            </a:r>
+            <a:r>
+              <a:rPr>
+                <a:solidFill>
+                  <a:srgbClr val="111638"/>
+                </a:solidFill>
+                <a:latin typeface="Consolas" panose="020B0609020204030204" pitchFamily="49" charset="0"/>
+                <a:cs typeface="Times New Roman" panose="02020603050405020304" pitchFamily="18" charset="0"/>
+              </a:rPr>
+              <a:t>):</a:t>
+            </a:r>
+          </a:p>
+        </p:txBody>
+      </p:sp>
+      <p:sp>
+        <p:nvSpPr>
+          <p:cNvPr id="19" name="PyTorch source line 6">
+            <a:extLst>
+              <a:ext uri="{FF2B5EF4-FFF2-40B4-BE49-F238E27FC236}">
+                <a16:creationId xmlns:a16="http://schemas.microsoft.com/office/drawing/2014/main" id="{6D3C340C-6713-4EF5-8460-58FE03BC17D7}"/>
+              </a:ext>
+            </a:extLst>
+          </p:cNvPr>
+          <p:cNvSpPr>
+            <a:spLocks noGrp="1"/>
+          </p:cNvSpPr>
+          <p:nvPr/>
+        </p:nvSpPr>
+        <p:spPr>
+          <a:xfrm>
+            <a:off x="567421" y="3133725"/>
+            <a:ext cx="2581275" cy="209550"/>
+          </a:xfrm>
+          <a:prstGeom prst="rect">
+            <a:avLst/>
+          </a:prstGeom>
+          <a:noFill/>
+          <a:ln w="0">
             <a:noFill/>
-            <a:ln w="0">
-              <a:noFill/>
-            </a:ln>
-          </p:spPr>
-          <p:txBody>
-            <a:bodyPr wrap="none" lIns="0" tIns="0" rIns="0" bIns="0" anchor="t">
-              <a:noAutofit/>
-            </a:bodyPr>
-            <a:lstStyle/>
-            <a:p>
-              <a:pPr algn="l">
-                <a:defRPr sz="1088" b="0">
-                  <a:solidFill>
-                    <a:srgbClr val="131846"/>
-                  </a:solidFill>
-                  <a:latin typeface="Consolas"/>
-                  <a:ea typeface="Consolas"/>
-                  <a:cs typeface="Consolas"/>
-                </a:defRPr>
-              </a:pPr>
-              <a:r>
-                <a:rPr>
-                  <a:solidFill>
-                    <a:srgbClr val="111638"/>
-                  </a:solidFill>
-                  <a:latin typeface="Consolas" panose="020B0609020204030204" pitchFamily="49" charset="0"/>
-                  <a:cs typeface="Times New Roman" panose="02020603050405020304" pitchFamily="18" charset="0"/>
-                </a:rPr>
-                <a:t>    </a:t>
-              </a:r>
-              <a:r>
-                <a:rPr>
-                  <a:solidFill>
-                    <a:srgbClr val="005BDE"/>
-                  </a:solidFill>
-                  <a:latin typeface="Consolas" panose="020B0609020204030204" pitchFamily="49" charset="0"/>
-                  <a:cs typeface="Times New Roman" panose="02020603050405020304" pitchFamily="18" charset="0"/>
-                </a:rPr>
-                <a:t>self</a:t>
-              </a:r>
-              <a:r>
-                <a:rPr>
-                  <a:solidFill>
-                    <a:srgbClr val="111638"/>
-                  </a:solidFill>
-                  <a:latin typeface="Consolas" panose="020B0609020204030204" pitchFamily="49" charset="0"/>
-                  <a:cs typeface="Times New Roman" panose="02020603050405020304" pitchFamily="18" charset="0"/>
-                </a:rPr>
-                <a:t>.fc = nn.Linear(</a:t>
-              </a:r>
-              <a:r>
-                <a:rPr>
-                  <a:solidFill>
-                    <a:srgbClr val="007787"/>
-                  </a:solidFill>
-                  <a:latin typeface="Consolas" panose="020B0609020204030204" pitchFamily="49" charset="0"/>
-                  <a:cs typeface="Times New Roman" panose="02020603050405020304" pitchFamily="18" charset="0"/>
-                </a:rPr>
-                <a:t>128</a:t>
-              </a:r>
-              <a:r>
-                <a:rPr>
-                  <a:solidFill>
-                    <a:srgbClr val="111638"/>
-                  </a:solidFill>
-                  <a:latin typeface="Consolas" panose="020B0609020204030204" pitchFamily="49" charset="0"/>
-                  <a:cs typeface="Times New Roman" panose="02020603050405020304" pitchFamily="18" charset="0"/>
-                </a:rPr>
-                <a:t>, </a:t>
-              </a:r>
-              <a:r>
-                <a:rPr>
-                  <a:solidFill>
-                    <a:srgbClr val="007787"/>
-                  </a:solidFill>
-                  <a:latin typeface="Consolas" panose="020B0609020204030204" pitchFamily="49" charset="0"/>
-                  <a:cs typeface="Times New Roman" panose="02020603050405020304" pitchFamily="18" charset="0"/>
-                </a:rPr>
-                <a:t>10</a:t>
-              </a:r>
-              <a:r>
-                <a:rPr>
-                  <a:solidFill>
-                    <a:srgbClr val="111638"/>
-                  </a:solidFill>
-                  <a:latin typeface="Consolas" panose="020B0609020204030204" pitchFamily="49" charset="0"/>
-                  <a:cs typeface="Times New Roman" panose="02020603050405020304" pitchFamily="18" charset="0"/>
-                </a:rPr>
-                <a:t>)</a:t>
-              </a:r>
-            </a:p>
-          </p:txBody>
-        </p:sp>
-        <p:sp>
-          <p:nvSpPr>
-            <p:cNvPr id="21" name="PyTorch source line 8">
-              <a:extLst>
-                <a:ext uri="{FF2B5EF4-FFF2-40B4-BE49-F238E27FC236}">
-                  <a16:creationId xmlns:a16="http://schemas.microsoft.com/office/drawing/2014/main" id="{DC82EC51-213E-414D-A99E-7634A0AA60BB}"/>
-                </a:ext>
-              </a:extLst>
-            </p:cNvPr>
-            <p:cNvSpPr>
-              <a:spLocks noGrp="1"/>
-            </p:cNvSpPr>
-            <p:nvPr/>
-          </p:nvSpPr>
-          <p:spPr>
-            <a:xfrm>
-              <a:off x="567421" y="3724275"/>
-              <a:ext cx="2581275" cy="209550"/>
-            </a:xfrm>
-            <a:prstGeom prst="rect">
-              <a:avLst/>
-            </a:prstGeom>
+          </a:ln>
+        </p:spPr>
+        <p:txBody>
+          <a:bodyPr wrap="none" lIns="0" tIns="0" rIns="0" bIns="0" anchor="t">
+            <a:noAutofit/>
+          </a:bodyPr>
+          <a:lstStyle/>
+          <a:p>
+            <a:pPr algn="l">
+              <a:defRPr sz="1088" b="0">
+                <a:solidFill>
+                  <a:srgbClr val="131846"/>
+                </a:solidFill>
+                <a:latin typeface="Consolas"/>
+                <a:ea typeface="Consolas"/>
+                <a:cs typeface="Consolas"/>
+              </a:defRPr>
+            </a:pPr>
+            <a:r>
+              <a:rPr dirty="0">
+                <a:solidFill>
+                  <a:srgbClr val="111638"/>
+                </a:solidFill>
+                <a:latin typeface="Consolas" panose="020B0609020204030204" pitchFamily="49" charset="0"/>
+                <a:cs typeface="Times New Roman" panose="02020603050405020304" pitchFamily="18" charset="0"/>
+              </a:rPr>
+              <a:t>    </a:t>
+            </a:r>
+            <a:r>
+              <a:rPr dirty="0">
+                <a:solidFill>
+                  <a:srgbClr val="005BDE"/>
+                </a:solidFill>
+                <a:latin typeface="Consolas" panose="020B0609020204030204" pitchFamily="49" charset="0"/>
+                <a:cs typeface="Times New Roman" panose="02020603050405020304" pitchFamily="18" charset="0"/>
+              </a:rPr>
+              <a:t>super</a:t>
+            </a:r>
+            <a:r>
+              <a:rPr dirty="0">
+                <a:solidFill>
+                  <a:srgbClr val="111638"/>
+                </a:solidFill>
+                <a:latin typeface="Consolas" panose="020B0609020204030204" pitchFamily="49" charset="0"/>
+                <a:cs typeface="Times New Roman" panose="02020603050405020304" pitchFamily="18" charset="0"/>
+              </a:rPr>
+              <a:t>().__</a:t>
+            </a:r>
+            <a:r>
+              <a:rPr dirty="0" err="1">
+                <a:solidFill>
+                  <a:srgbClr val="111638"/>
+                </a:solidFill>
+                <a:latin typeface="Consolas" panose="020B0609020204030204" pitchFamily="49" charset="0"/>
+                <a:cs typeface="Times New Roman" panose="02020603050405020304" pitchFamily="18" charset="0"/>
+              </a:rPr>
+              <a:t>init</a:t>
+            </a:r>
+            <a:r>
+              <a:rPr dirty="0">
+                <a:solidFill>
+                  <a:srgbClr val="111638"/>
+                </a:solidFill>
+                <a:latin typeface="Consolas" panose="020B0609020204030204" pitchFamily="49" charset="0"/>
+                <a:cs typeface="Times New Roman" panose="02020603050405020304" pitchFamily="18" charset="0"/>
+              </a:rPr>
+              <a:t>__()</a:t>
+            </a:r>
+          </a:p>
+        </p:txBody>
+      </p:sp>
+      <p:sp>
+        <p:nvSpPr>
+          <p:cNvPr id="20" name="PyTorch source line 7">
+            <a:extLst>
+              <a:ext uri="{FF2B5EF4-FFF2-40B4-BE49-F238E27FC236}">
+                <a16:creationId xmlns:a16="http://schemas.microsoft.com/office/drawing/2014/main" id="{462C9EE7-A2DE-4DA9-97C4-0C5631B993E5}"/>
+              </a:ext>
+            </a:extLst>
+          </p:cNvPr>
+          <p:cNvSpPr>
+            <a:spLocks noGrp="1"/>
+          </p:cNvSpPr>
+          <p:nvPr/>
+        </p:nvSpPr>
+        <p:spPr>
+          <a:xfrm>
+            <a:off x="567421" y="3429000"/>
+            <a:ext cx="2581275" cy="209550"/>
+          </a:xfrm>
+          <a:prstGeom prst="rect">
+            <a:avLst/>
+          </a:prstGeom>
+          <a:noFill/>
+          <a:ln w="0">
             <a:noFill/>
-            <a:ln w="0">
-              <a:noFill/>
-            </a:ln>
-          </p:spPr>
-          <p:txBody>
-            <a:bodyPr wrap="none" lIns="0" tIns="0" rIns="0" bIns="0" anchor="t">
-              <a:noAutofit/>
-            </a:bodyPr>
-            <a:lstStyle/>
-            <a:p>
-              <a:pPr algn="l">
-                <a:defRPr sz="1088" b="0">
-                  <a:solidFill>
-                    <a:srgbClr val="131846"/>
-                  </a:solidFill>
-                  <a:latin typeface="Consolas"/>
-                  <a:ea typeface="Consolas"/>
-                  <a:cs typeface="Consolas"/>
-                </a:defRPr>
-              </a:pPr>
-              <a:r>
-                <a:rPr>
-                  <a:solidFill>
-                    <a:srgbClr val="111638"/>
-                  </a:solidFill>
-                  <a:latin typeface="Consolas" panose="020B0609020204030204" pitchFamily="49" charset="0"/>
-                  <a:cs typeface="Times New Roman" panose="02020603050405020304" pitchFamily="18" charset="0"/>
-                </a:rPr>
-                <a:t>  </a:t>
-              </a:r>
-              <a:r>
-                <a:rPr>
-                  <a:solidFill>
-                    <a:srgbClr val="C800D4"/>
-                  </a:solidFill>
-                  <a:latin typeface="Consolas" panose="020B0609020204030204" pitchFamily="49" charset="0"/>
-                  <a:cs typeface="Times New Roman" panose="02020603050405020304" pitchFamily="18" charset="0"/>
-                </a:rPr>
-                <a:t>def</a:t>
-              </a:r>
-              <a:r>
-                <a:rPr>
-                  <a:solidFill>
-                    <a:srgbClr val="111638"/>
-                  </a:solidFill>
-                  <a:latin typeface="Consolas" panose="020B0609020204030204" pitchFamily="49" charset="0"/>
-                  <a:cs typeface="Times New Roman" panose="02020603050405020304" pitchFamily="18" charset="0"/>
-                </a:rPr>
-                <a:t> </a:t>
-              </a:r>
-              <a:r>
-                <a:rPr>
-                  <a:solidFill>
-                    <a:srgbClr val="005BDE"/>
-                  </a:solidFill>
-                  <a:latin typeface="Consolas" panose="020B0609020204030204" pitchFamily="49" charset="0"/>
-                  <a:cs typeface="Times New Roman" panose="02020603050405020304" pitchFamily="18" charset="0"/>
-                </a:rPr>
-                <a:t>forward</a:t>
-              </a:r>
-              <a:r>
-                <a:rPr>
-                  <a:solidFill>
-                    <a:srgbClr val="111638"/>
-                  </a:solidFill>
-                  <a:latin typeface="Consolas" panose="020B0609020204030204" pitchFamily="49" charset="0"/>
-                  <a:cs typeface="Times New Roman" panose="02020603050405020304" pitchFamily="18" charset="0"/>
-                </a:rPr>
-                <a:t>(</a:t>
-              </a:r>
-              <a:r>
-                <a:rPr>
-                  <a:solidFill>
-                    <a:srgbClr val="005BDE"/>
-                  </a:solidFill>
-                  <a:latin typeface="Consolas" panose="020B0609020204030204" pitchFamily="49" charset="0"/>
-                  <a:cs typeface="Times New Roman" panose="02020603050405020304" pitchFamily="18" charset="0"/>
-                </a:rPr>
-                <a:t>self</a:t>
-              </a:r>
-              <a:r>
-                <a:rPr>
-                  <a:solidFill>
-                    <a:srgbClr val="111638"/>
-                  </a:solidFill>
-                  <a:latin typeface="Consolas" panose="020B0609020204030204" pitchFamily="49" charset="0"/>
-                  <a:cs typeface="Times New Roman" panose="02020603050405020304" pitchFamily="18" charset="0"/>
-                </a:rPr>
-                <a:t>, x):</a:t>
-              </a:r>
-            </a:p>
-          </p:txBody>
-        </p:sp>
-        <p:sp>
-          <p:nvSpPr>
-            <p:cNvPr id="22" name="PyTorch source line 9">
-              <a:extLst>
-                <a:ext uri="{FF2B5EF4-FFF2-40B4-BE49-F238E27FC236}">
-                  <a16:creationId xmlns:a16="http://schemas.microsoft.com/office/drawing/2014/main" id="{7D4D384E-7886-41AF-95A7-7211E196B4EE}"/>
-                </a:ext>
-              </a:extLst>
-            </p:cNvPr>
-            <p:cNvSpPr>
-              <a:spLocks noGrp="1"/>
-            </p:cNvSpPr>
-            <p:nvPr/>
-          </p:nvSpPr>
-          <p:spPr>
-            <a:xfrm>
-              <a:off x="567421" y="4019550"/>
-              <a:ext cx="2581275" cy="209550"/>
-            </a:xfrm>
-            <a:prstGeom prst="rect">
-              <a:avLst/>
-            </a:prstGeom>
+          </a:ln>
+        </p:spPr>
+        <p:txBody>
+          <a:bodyPr wrap="none" lIns="0" tIns="0" rIns="0" bIns="0" anchor="t">
+            <a:noAutofit/>
+          </a:bodyPr>
+          <a:lstStyle/>
+          <a:p>
+            <a:pPr algn="l">
+              <a:defRPr sz="1088" b="0">
+                <a:solidFill>
+                  <a:srgbClr val="131846"/>
+                </a:solidFill>
+                <a:latin typeface="Consolas"/>
+                <a:ea typeface="Consolas"/>
+                <a:cs typeface="Consolas"/>
+              </a:defRPr>
+            </a:pPr>
+            <a:r>
+              <a:rPr>
+                <a:solidFill>
+                  <a:srgbClr val="111638"/>
+                </a:solidFill>
+                <a:latin typeface="Consolas" panose="020B0609020204030204" pitchFamily="49" charset="0"/>
+                <a:cs typeface="Times New Roman" panose="02020603050405020304" pitchFamily="18" charset="0"/>
+              </a:rPr>
+              <a:t>    </a:t>
+            </a:r>
+            <a:r>
+              <a:rPr>
+                <a:solidFill>
+                  <a:srgbClr val="005BDE"/>
+                </a:solidFill>
+                <a:latin typeface="Consolas" panose="020B0609020204030204" pitchFamily="49" charset="0"/>
+                <a:cs typeface="Times New Roman" panose="02020603050405020304" pitchFamily="18" charset="0"/>
+              </a:rPr>
+              <a:t>self</a:t>
+            </a:r>
+            <a:r>
+              <a:rPr>
+                <a:solidFill>
+                  <a:srgbClr val="111638"/>
+                </a:solidFill>
+                <a:latin typeface="Consolas" panose="020B0609020204030204" pitchFamily="49" charset="0"/>
+                <a:cs typeface="Times New Roman" panose="02020603050405020304" pitchFamily="18" charset="0"/>
+              </a:rPr>
+              <a:t>.fc = nn.Linear(</a:t>
+            </a:r>
+            <a:r>
+              <a:rPr>
+                <a:solidFill>
+                  <a:srgbClr val="007787"/>
+                </a:solidFill>
+                <a:latin typeface="Consolas" panose="020B0609020204030204" pitchFamily="49" charset="0"/>
+                <a:cs typeface="Times New Roman" panose="02020603050405020304" pitchFamily="18" charset="0"/>
+              </a:rPr>
+              <a:t>128</a:t>
+            </a:r>
+            <a:r>
+              <a:rPr>
+                <a:solidFill>
+                  <a:srgbClr val="111638"/>
+                </a:solidFill>
+                <a:latin typeface="Consolas" panose="020B0609020204030204" pitchFamily="49" charset="0"/>
+                <a:cs typeface="Times New Roman" panose="02020603050405020304" pitchFamily="18" charset="0"/>
+              </a:rPr>
+              <a:t>, </a:t>
+            </a:r>
+            <a:r>
+              <a:rPr>
+                <a:solidFill>
+                  <a:srgbClr val="007787"/>
+                </a:solidFill>
+                <a:latin typeface="Consolas" panose="020B0609020204030204" pitchFamily="49" charset="0"/>
+                <a:cs typeface="Times New Roman" panose="02020603050405020304" pitchFamily="18" charset="0"/>
+              </a:rPr>
+              <a:t>10</a:t>
+            </a:r>
+            <a:r>
+              <a:rPr>
+                <a:solidFill>
+                  <a:srgbClr val="111638"/>
+                </a:solidFill>
+                <a:latin typeface="Consolas" panose="020B0609020204030204" pitchFamily="49" charset="0"/>
+                <a:cs typeface="Times New Roman" panose="02020603050405020304" pitchFamily="18" charset="0"/>
+              </a:rPr>
+              <a:t>)</a:t>
+            </a:r>
+          </a:p>
+        </p:txBody>
+      </p:sp>
+      <p:sp>
+        <p:nvSpPr>
+          <p:cNvPr id="21" name="PyTorch source line 8">
+            <a:extLst>
+              <a:ext uri="{FF2B5EF4-FFF2-40B4-BE49-F238E27FC236}">
+                <a16:creationId xmlns:a16="http://schemas.microsoft.com/office/drawing/2014/main" id="{DC82EC51-213E-414D-A99E-7634A0AA60BB}"/>
+              </a:ext>
+            </a:extLst>
+          </p:cNvPr>
+          <p:cNvSpPr>
+            <a:spLocks noGrp="1"/>
+          </p:cNvSpPr>
+          <p:nvPr/>
+        </p:nvSpPr>
+        <p:spPr>
+          <a:xfrm>
+            <a:off x="567421" y="3724275"/>
+            <a:ext cx="2581275" cy="209550"/>
+          </a:xfrm>
+          <a:prstGeom prst="rect">
+            <a:avLst/>
+          </a:prstGeom>
+          <a:noFill/>
+          <a:ln w="0">
             <a:noFill/>
-            <a:ln w="0">
-              <a:noFill/>
-            </a:ln>
-          </p:spPr>
-          <p:txBody>
-            <a:bodyPr wrap="none" lIns="0" tIns="0" rIns="0" bIns="0" anchor="t">
-              <a:noAutofit/>
-            </a:bodyPr>
-            <a:lstStyle/>
-            <a:p>
-              <a:pPr algn="l">
-                <a:defRPr sz="1088" b="0">
-                  <a:solidFill>
-                    <a:srgbClr val="131846"/>
-                  </a:solidFill>
-                  <a:latin typeface="Consolas"/>
-                  <a:ea typeface="Consolas"/>
-                  <a:cs typeface="Consolas"/>
-                </a:defRPr>
-              </a:pPr>
-              <a:r>
-                <a:rPr>
-                  <a:solidFill>
-                    <a:srgbClr val="111638"/>
-                  </a:solidFill>
-                  <a:latin typeface="Consolas" panose="020B0609020204030204" pitchFamily="49" charset="0"/>
-                  <a:cs typeface="Times New Roman" panose="02020603050405020304" pitchFamily="18" charset="0"/>
-                </a:rPr>
-                <a:t>    </a:t>
-              </a:r>
-              <a:r>
-                <a:rPr>
-                  <a:solidFill>
-                    <a:srgbClr val="C800D4"/>
-                  </a:solidFill>
-                  <a:latin typeface="Consolas" panose="020B0609020204030204" pitchFamily="49" charset="0"/>
-                  <a:cs typeface="Times New Roman" panose="02020603050405020304" pitchFamily="18" charset="0"/>
-                </a:rPr>
-                <a:t>return</a:t>
-              </a:r>
-              <a:r>
-                <a:rPr>
-                  <a:solidFill>
-                    <a:srgbClr val="111638"/>
-                  </a:solidFill>
-                  <a:latin typeface="Consolas" panose="020B0609020204030204" pitchFamily="49" charset="0"/>
-                  <a:cs typeface="Times New Roman" panose="02020603050405020304" pitchFamily="18" charset="0"/>
-                </a:rPr>
-                <a:t> </a:t>
-              </a:r>
-              <a:r>
-                <a:rPr>
-                  <a:solidFill>
-                    <a:srgbClr val="005BDE"/>
-                  </a:solidFill>
-                  <a:latin typeface="Consolas" panose="020B0609020204030204" pitchFamily="49" charset="0"/>
-                  <a:cs typeface="Times New Roman" panose="02020603050405020304" pitchFamily="18" charset="0"/>
-                </a:rPr>
-                <a:t>self</a:t>
-              </a:r>
-              <a:r>
-                <a:rPr>
-                  <a:solidFill>
-                    <a:srgbClr val="111638"/>
-                  </a:solidFill>
-                  <a:latin typeface="Consolas" panose="020B0609020204030204" pitchFamily="49" charset="0"/>
-                  <a:cs typeface="Times New Roman" panose="02020603050405020304" pitchFamily="18" charset="0"/>
-                </a:rPr>
-                <a:t>.fc(x)</a:t>
-              </a:r>
-            </a:p>
-          </p:txBody>
-        </p:sp>
-        <p:sp>
-          <p:nvSpPr>
-            <p:cNvPr id="23" name="PyTorch source line 10">
-              <a:extLst>
-                <a:ext uri="{FF2B5EF4-FFF2-40B4-BE49-F238E27FC236}">
-                  <a16:creationId xmlns:a16="http://schemas.microsoft.com/office/drawing/2014/main" id="{1B2EA93F-F447-4C82-8C1D-F3DD0B2FF976}"/>
-                </a:ext>
-              </a:extLst>
-            </p:cNvPr>
-            <p:cNvSpPr>
-              <a:spLocks noGrp="1"/>
-            </p:cNvSpPr>
-            <p:nvPr/>
-          </p:nvSpPr>
-          <p:spPr>
-            <a:xfrm>
-              <a:off x="523875" y="4314825"/>
-              <a:ext cx="2581275" cy="209550"/>
-            </a:xfrm>
-            <a:prstGeom prst="rect">
-              <a:avLst/>
-            </a:prstGeom>
+          </a:ln>
+        </p:spPr>
+        <p:txBody>
+          <a:bodyPr wrap="none" lIns="0" tIns="0" rIns="0" bIns="0" anchor="t">
+            <a:noAutofit/>
+          </a:bodyPr>
+          <a:lstStyle/>
+          <a:p>
+            <a:pPr algn="l">
+              <a:defRPr sz="1088" b="0">
+                <a:solidFill>
+                  <a:srgbClr val="131846"/>
+                </a:solidFill>
+                <a:latin typeface="Consolas"/>
+                <a:ea typeface="Consolas"/>
+                <a:cs typeface="Consolas"/>
+              </a:defRPr>
+            </a:pPr>
+            <a:r>
+              <a:rPr>
+                <a:solidFill>
+                  <a:srgbClr val="111638"/>
+                </a:solidFill>
+                <a:latin typeface="Consolas" panose="020B0609020204030204" pitchFamily="49" charset="0"/>
+                <a:cs typeface="Times New Roman" panose="02020603050405020304" pitchFamily="18" charset="0"/>
+              </a:rPr>
+              <a:t>  </a:t>
+            </a:r>
+            <a:r>
+              <a:rPr>
+                <a:solidFill>
+                  <a:srgbClr val="C800D4"/>
+                </a:solidFill>
+                <a:latin typeface="Consolas" panose="020B0609020204030204" pitchFamily="49" charset="0"/>
+                <a:cs typeface="Times New Roman" panose="02020603050405020304" pitchFamily="18" charset="0"/>
+              </a:rPr>
+              <a:t>def</a:t>
+            </a:r>
+            <a:r>
+              <a:rPr>
+                <a:solidFill>
+                  <a:srgbClr val="111638"/>
+                </a:solidFill>
+                <a:latin typeface="Consolas" panose="020B0609020204030204" pitchFamily="49" charset="0"/>
+                <a:cs typeface="Times New Roman" panose="02020603050405020304" pitchFamily="18" charset="0"/>
+              </a:rPr>
+              <a:t> </a:t>
+            </a:r>
+            <a:r>
+              <a:rPr>
+                <a:solidFill>
+                  <a:srgbClr val="005BDE"/>
+                </a:solidFill>
+                <a:latin typeface="Consolas" panose="020B0609020204030204" pitchFamily="49" charset="0"/>
+                <a:cs typeface="Times New Roman" panose="02020603050405020304" pitchFamily="18" charset="0"/>
+              </a:rPr>
+              <a:t>forward</a:t>
+            </a:r>
+            <a:r>
+              <a:rPr>
+                <a:solidFill>
+                  <a:srgbClr val="111638"/>
+                </a:solidFill>
+                <a:latin typeface="Consolas" panose="020B0609020204030204" pitchFamily="49" charset="0"/>
+                <a:cs typeface="Times New Roman" panose="02020603050405020304" pitchFamily="18" charset="0"/>
+              </a:rPr>
+              <a:t>(</a:t>
+            </a:r>
+            <a:r>
+              <a:rPr>
+                <a:solidFill>
+                  <a:srgbClr val="005BDE"/>
+                </a:solidFill>
+                <a:latin typeface="Consolas" panose="020B0609020204030204" pitchFamily="49" charset="0"/>
+                <a:cs typeface="Times New Roman" panose="02020603050405020304" pitchFamily="18" charset="0"/>
+              </a:rPr>
+              <a:t>self</a:t>
+            </a:r>
+            <a:r>
+              <a:rPr>
+                <a:solidFill>
+                  <a:srgbClr val="111638"/>
+                </a:solidFill>
+                <a:latin typeface="Consolas" panose="020B0609020204030204" pitchFamily="49" charset="0"/>
+                <a:cs typeface="Times New Roman" panose="02020603050405020304" pitchFamily="18" charset="0"/>
+              </a:rPr>
+              <a:t>, x):</a:t>
+            </a:r>
+          </a:p>
+        </p:txBody>
+      </p:sp>
+      <p:sp>
+        <p:nvSpPr>
+          <p:cNvPr id="22" name="PyTorch source line 9">
+            <a:extLst>
+              <a:ext uri="{FF2B5EF4-FFF2-40B4-BE49-F238E27FC236}">
+                <a16:creationId xmlns:a16="http://schemas.microsoft.com/office/drawing/2014/main" id="{7D4D384E-7886-41AF-95A7-7211E196B4EE}"/>
+              </a:ext>
+            </a:extLst>
+          </p:cNvPr>
+          <p:cNvSpPr>
+            <a:spLocks noGrp="1"/>
+          </p:cNvSpPr>
+          <p:nvPr/>
+        </p:nvSpPr>
+        <p:spPr>
+          <a:xfrm>
+            <a:off x="567421" y="4019550"/>
+            <a:ext cx="2581275" cy="209550"/>
+          </a:xfrm>
+          <a:prstGeom prst="rect">
+            <a:avLst/>
+          </a:prstGeom>
+          <a:noFill/>
+          <a:ln w="0">
             <a:noFill/>
-            <a:ln w="0">
-              <a:noFill/>
-            </a:ln>
-          </p:spPr>
-          <p:txBody>
-            <a:bodyPr wrap="none" lIns="0" tIns="0" rIns="0" bIns="0" anchor="t">
-              <a:noAutofit/>
-            </a:bodyPr>
-            <a:lstStyle/>
-            <a:p>
-              <a:pPr algn="l">
-                <a:defRPr sz="1088" b="0">
-                  <a:solidFill>
-                    <a:srgbClr val="131846"/>
-                  </a:solidFill>
-                  <a:latin typeface="Consolas"/>
-                  <a:ea typeface="Consolas"/>
-                  <a:cs typeface="Consolas"/>
-                </a:defRPr>
-              </a:pPr>
-              <a:endParaRPr>
-                <a:latin typeface="Times New Roman" panose="02020603050405020304" pitchFamily="18" charset="0"/>
+          </a:ln>
+        </p:spPr>
+        <p:txBody>
+          <a:bodyPr wrap="none" lIns="0" tIns="0" rIns="0" bIns="0" anchor="t">
+            <a:noAutofit/>
+          </a:bodyPr>
+          <a:lstStyle/>
+          <a:p>
+            <a:pPr algn="l">
+              <a:defRPr sz="1088" b="0">
+                <a:solidFill>
+                  <a:srgbClr val="131846"/>
+                </a:solidFill>
+                <a:latin typeface="Consolas"/>
+                <a:ea typeface="Consolas"/>
+                <a:cs typeface="Consolas"/>
+              </a:defRPr>
+            </a:pPr>
+            <a:r>
+              <a:rPr>
+                <a:solidFill>
+                  <a:srgbClr val="111638"/>
+                </a:solidFill>
+                <a:latin typeface="Consolas" panose="020B0609020204030204" pitchFamily="49" charset="0"/>
                 <a:cs typeface="Times New Roman" panose="02020603050405020304" pitchFamily="18" charset="0"/>
-              </a:endParaRPr>
-            </a:p>
-          </p:txBody>
-        </p:sp>
-        <p:sp>
-          <p:nvSpPr>
-            <p:cNvPr id="24" name="PyTorch source line 11">
-              <a:extLst>
-                <a:ext uri="{FF2B5EF4-FFF2-40B4-BE49-F238E27FC236}">
-                  <a16:creationId xmlns:a16="http://schemas.microsoft.com/office/drawing/2014/main" id="{D669C572-15E1-4509-AB86-715E51F05E7D}"/>
-                </a:ext>
-              </a:extLst>
-            </p:cNvPr>
-            <p:cNvSpPr>
-              <a:spLocks noGrp="1"/>
-            </p:cNvSpPr>
-            <p:nvPr/>
-          </p:nvSpPr>
-          <p:spPr>
-            <a:xfrm>
-              <a:off x="567421" y="4610100"/>
-              <a:ext cx="2581275" cy="209550"/>
-            </a:xfrm>
-            <a:prstGeom prst="rect">
-              <a:avLst/>
-            </a:prstGeom>
+              </a:rPr>
+              <a:t>    </a:t>
+            </a:r>
+            <a:r>
+              <a:rPr>
+                <a:solidFill>
+                  <a:srgbClr val="C800D4"/>
+                </a:solidFill>
+                <a:latin typeface="Consolas" panose="020B0609020204030204" pitchFamily="49" charset="0"/>
+                <a:cs typeface="Times New Roman" panose="02020603050405020304" pitchFamily="18" charset="0"/>
+              </a:rPr>
+              <a:t>return</a:t>
+            </a:r>
+            <a:r>
+              <a:rPr>
+                <a:solidFill>
+                  <a:srgbClr val="111638"/>
+                </a:solidFill>
+                <a:latin typeface="Consolas" panose="020B0609020204030204" pitchFamily="49" charset="0"/>
+                <a:cs typeface="Times New Roman" panose="02020603050405020304" pitchFamily="18" charset="0"/>
+              </a:rPr>
+              <a:t> </a:t>
+            </a:r>
+            <a:r>
+              <a:rPr>
+                <a:solidFill>
+                  <a:srgbClr val="005BDE"/>
+                </a:solidFill>
+                <a:latin typeface="Consolas" panose="020B0609020204030204" pitchFamily="49" charset="0"/>
+                <a:cs typeface="Times New Roman" panose="02020603050405020304" pitchFamily="18" charset="0"/>
+              </a:rPr>
+              <a:t>self</a:t>
+            </a:r>
+            <a:r>
+              <a:rPr>
+                <a:solidFill>
+                  <a:srgbClr val="111638"/>
+                </a:solidFill>
+                <a:latin typeface="Consolas" panose="020B0609020204030204" pitchFamily="49" charset="0"/>
+                <a:cs typeface="Times New Roman" panose="02020603050405020304" pitchFamily="18" charset="0"/>
+              </a:rPr>
+              <a:t>.fc(x)</a:t>
+            </a:r>
+          </a:p>
+        </p:txBody>
+      </p:sp>
+      <p:sp>
+        <p:nvSpPr>
+          <p:cNvPr id="23" name="PyTorch source line 10">
+            <a:extLst>
+              <a:ext uri="{FF2B5EF4-FFF2-40B4-BE49-F238E27FC236}">
+                <a16:creationId xmlns:a16="http://schemas.microsoft.com/office/drawing/2014/main" id="{1B2EA93F-F447-4C82-8C1D-F3DD0B2FF976}"/>
+              </a:ext>
+            </a:extLst>
+          </p:cNvPr>
+          <p:cNvSpPr>
+            <a:spLocks noGrp="1"/>
+          </p:cNvSpPr>
+          <p:nvPr/>
+        </p:nvSpPr>
+        <p:spPr>
+          <a:xfrm>
+            <a:off x="523875" y="4314825"/>
+            <a:ext cx="2581275" cy="209550"/>
+          </a:xfrm>
+          <a:prstGeom prst="rect">
+            <a:avLst/>
+          </a:prstGeom>
+          <a:noFill/>
+          <a:ln w="0">
             <a:noFill/>
-            <a:ln w="0">
-              <a:noFill/>
-            </a:ln>
-          </p:spPr>
-          <p:txBody>
-            <a:bodyPr wrap="none" lIns="0" tIns="0" rIns="0" bIns="0" anchor="t">
-              <a:noAutofit/>
-            </a:bodyPr>
-            <a:lstStyle/>
-            <a:p>
-              <a:pPr algn="l">
-                <a:defRPr sz="1088" b="0">
-                  <a:solidFill>
-                    <a:srgbClr val="131846"/>
-                  </a:solidFill>
-                  <a:latin typeface="Consolas"/>
-                  <a:ea typeface="Consolas"/>
-                  <a:cs typeface="Consolas"/>
-                </a:defRPr>
-              </a:pPr>
-              <a:r>
-                <a:rPr>
-                  <a:solidFill>
-                    <a:srgbClr val="257B86"/>
-                  </a:solidFill>
-                  <a:latin typeface="Consolas" panose="020B0609020204030204" pitchFamily="49" charset="0"/>
-                  <a:cs typeface="Times New Roman" panose="02020603050405020304" pitchFamily="18" charset="0"/>
-                </a:rPr>
-                <a:t># training loop</a:t>
-              </a:r>
-            </a:p>
-          </p:txBody>
-        </p:sp>
-        <p:sp>
-          <p:nvSpPr>
-            <p:cNvPr id="25" name="PyTorch source line 12">
-              <a:extLst>
-                <a:ext uri="{FF2B5EF4-FFF2-40B4-BE49-F238E27FC236}">
-                  <a16:creationId xmlns:a16="http://schemas.microsoft.com/office/drawing/2014/main" id="{00F44B11-F3B0-46BC-B417-C9E6A7368F85}"/>
-                </a:ext>
-              </a:extLst>
-            </p:cNvPr>
-            <p:cNvSpPr>
-              <a:spLocks noGrp="1"/>
-            </p:cNvSpPr>
-            <p:nvPr/>
-          </p:nvSpPr>
-          <p:spPr>
-            <a:xfrm>
-              <a:off x="567421" y="4905375"/>
-              <a:ext cx="2581275" cy="209550"/>
-            </a:xfrm>
-            <a:prstGeom prst="rect">
-              <a:avLst/>
-            </a:prstGeom>
+          </a:ln>
+        </p:spPr>
+        <p:txBody>
+          <a:bodyPr wrap="none" lIns="0" tIns="0" rIns="0" bIns="0" anchor="t">
+            <a:noAutofit/>
+          </a:bodyPr>
+          <a:lstStyle/>
+          <a:p>
+            <a:pPr algn="l">
+              <a:defRPr sz="1088" b="0">
+                <a:solidFill>
+                  <a:srgbClr val="131846"/>
+                </a:solidFill>
+                <a:latin typeface="Consolas"/>
+                <a:ea typeface="Consolas"/>
+                <a:cs typeface="Consolas"/>
+              </a:defRPr>
+            </a:pPr>
+            <a:endParaRPr>
+              <a:latin typeface="Times New Roman" panose="02020603050405020304" pitchFamily="18" charset="0"/>
+              <a:cs typeface="Times New Roman" panose="02020603050405020304" pitchFamily="18" charset="0"/>
+            </a:endParaRPr>
+          </a:p>
+        </p:txBody>
+      </p:sp>
+      <p:sp>
+        <p:nvSpPr>
+          <p:cNvPr id="24" name="PyTorch source line 11">
+            <a:extLst>
+              <a:ext uri="{FF2B5EF4-FFF2-40B4-BE49-F238E27FC236}">
+                <a16:creationId xmlns:a16="http://schemas.microsoft.com/office/drawing/2014/main" id="{D669C572-15E1-4509-AB86-715E51F05E7D}"/>
+              </a:ext>
+            </a:extLst>
+          </p:cNvPr>
+          <p:cNvSpPr>
+            <a:spLocks noGrp="1"/>
+          </p:cNvSpPr>
+          <p:nvPr/>
+        </p:nvSpPr>
+        <p:spPr>
+          <a:xfrm>
+            <a:off x="567421" y="4610100"/>
+            <a:ext cx="2581275" cy="209550"/>
+          </a:xfrm>
+          <a:prstGeom prst="rect">
+            <a:avLst/>
+          </a:prstGeom>
+          <a:noFill/>
+          <a:ln w="0">
             <a:noFill/>
-            <a:ln w="0">
-              <a:noFill/>
-            </a:ln>
-          </p:spPr>
-          <p:txBody>
-            <a:bodyPr wrap="none" lIns="0" tIns="0" rIns="0" bIns="0" anchor="t">
-              <a:noAutofit/>
-            </a:bodyPr>
-            <a:lstStyle/>
-            <a:p>
-              <a:pPr algn="l">
-                <a:defRPr sz="1088" b="0">
-                  <a:solidFill>
-                    <a:srgbClr val="131846"/>
-                  </a:solidFill>
-                  <a:latin typeface="Consolas"/>
-                  <a:ea typeface="Consolas"/>
-                  <a:cs typeface="Consolas"/>
-                </a:defRPr>
-              </a:pPr>
-              <a:r>
-                <a:rPr>
-                  <a:solidFill>
-                    <a:srgbClr val="111638"/>
-                  </a:solidFill>
-                  <a:latin typeface="Consolas" panose="020B0609020204030204" pitchFamily="49" charset="0"/>
-                  <a:cs typeface="Times New Roman" panose="02020603050405020304" pitchFamily="18" charset="0"/>
-                </a:rPr>
-                <a:t>model = </a:t>
-              </a:r>
-              <a:r>
-                <a:rPr>
-                  <a:solidFill>
-                    <a:srgbClr val="005BDE"/>
-                  </a:solidFill>
-                  <a:latin typeface="Consolas" panose="020B0609020204030204" pitchFamily="49" charset="0"/>
-                  <a:cs typeface="Times New Roman" panose="02020603050405020304" pitchFamily="18" charset="0"/>
-                </a:rPr>
-                <a:t>Net</a:t>
-              </a:r>
-              <a:r>
-                <a:rPr>
-                  <a:solidFill>
-                    <a:srgbClr val="111638"/>
-                  </a:solidFill>
-                  <a:latin typeface="Consolas" panose="020B0609020204030204" pitchFamily="49" charset="0"/>
-                  <a:cs typeface="Times New Roman" panose="02020603050405020304" pitchFamily="18" charset="0"/>
-                </a:rPr>
-                <a:t>().to(device)</a:t>
-              </a:r>
-            </a:p>
-          </p:txBody>
-        </p:sp>
-        <p:sp>
-          <p:nvSpPr>
-            <p:cNvPr id="26" name="PyTorch source line 13">
-              <a:extLst>
-                <a:ext uri="{FF2B5EF4-FFF2-40B4-BE49-F238E27FC236}">
-                  <a16:creationId xmlns:a16="http://schemas.microsoft.com/office/drawing/2014/main" id="{6381B4AC-67D4-46AD-9F97-17C71AF0A032}"/>
-                </a:ext>
-              </a:extLst>
-            </p:cNvPr>
-            <p:cNvSpPr>
-              <a:spLocks noGrp="1"/>
-            </p:cNvSpPr>
-            <p:nvPr/>
-          </p:nvSpPr>
-          <p:spPr>
-            <a:xfrm>
-              <a:off x="567421" y="5200650"/>
-              <a:ext cx="2581275" cy="209550"/>
-            </a:xfrm>
-            <a:prstGeom prst="rect">
-              <a:avLst/>
-            </a:prstGeom>
+          </a:ln>
+        </p:spPr>
+        <p:txBody>
+          <a:bodyPr wrap="none" lIns="0" tIns="0" rIns="0" bIns="0" anchor="t">
+            <a:noAutofit/>
+          </a:bodyPr>
+          <a:lstStyle/>
+          <a:p>
+            <a:pPr algn="l">
+              <a:defRPr sz="1088" b="0">
+                <a:solidFill>
+                  <a:srgbClr val="131846"/>
+                </a:solidFill>
+                <a:latin typeface="Consolas"/>
+                <a:ea typeface="Consolas"/>
+                <a:cs typeface="Consolas"/>
+              </a:defRPr>
+            </a:pPr>
+            <a:r>
+              <a:rPr>
+                <a:solidFill>
+                  <a:srgbClr val="257B86"/>
+                </a:solidFill>
+                <a:latin typeface="Consolas" panose="020B0609020204030204" pitchFamily="49" charset="0"/>
+                <a:cs typeface="Times New Roman" panose="02020603050405020304" pitchFamily="18" charset="0"/>
+              </a:rPr>
+              <a:t># training loop</a:t>
+            </a:r>
+          </a:p>
+        </p:txBody>
+      </p:sp>
+      <p:sp>
+        <p:nvSpPr>
+          <p:cNvPr id="25" name="PyTorch source line 12">
+            <a:extLst>
+              <a:ext uri="{FF2B5EF4-FFF2-40B4-BE49-F238E27FC236}">
+                <a16:creationId xmlns:a16="http://schemas.microsoft.com/office/drawing/2014/main" id="{00F44B11-F3B0-46BC-B417-C9E6A7368F85}"/>
+              </a:ext>
+            </a:extLst>
+          </p:cNvPr>
+          <p:cNvSpPr>
+            <a:spLocks noGrp="1"/>
+          </p:cNvSpPr>
+          <p:nvPr/>
+        </p:nvSpPr>
+        <p:spPr>
+          <a:xfrm>
+            <a:off x="567421" y="4905375"/>
+            <a:ext cx="2581275" cy="209550"/>
+          </a:xfrm>
+          <a:prstGeom prst="rect">
+            <a:avLst/>
+          </a:prstGeom>
+          <a:noFill/>
+          <a:ln w="0">
             <a:noFill/>
-            <a:ln w="0">
-              <a:noFill/>
-            </a:ln>
-          </p:spPr>
-          <p:txBody>
-            <a:bodyPr wrap="none" lIns="0" tIns="0" rIns="0" bIns="0" anchor="t">
-              <a:noAutofit/>
-            </a:bodyPr>
-            <a:lstStyle/>
-            <a:p>
-              <a:pPr algn="l">
-                <a:defRPr sz="1088" b="0">
-                  <a:solidFill>
-                    <a:srgbClr val="131846"/>
-                  </a:solidFill>
-                  <a:latin typeface="Consolas"/>
-                  <a:ea typeface="Consolas"/>
-                  <a:cs typeface="Consolas"/>
-                </a:defRPr>
-              </a:pPr>
-              <a:r>
-                <a:rPr>
-                  <a:solidFill>
-                    <a:srgbClr val="111638"/>
-                  </a:solidFill>
-                  <a:latin typeface="Consolas" panose="020B0609020204030204" pitchFamily="49" charset="0"/>
-                  <a:cs typeface="Times New Roman" panose="02020603050405020304" pitchFamily="18" charset="0"/>
-                </a:rPr>
-                <a:t>for x, y in loader:</a:t>
-              </a:r>
-            </a:p>
-          </p:txBody>
-        </p:sp>
-        <p:sp>
-          <p:nvSpPr>
-            <p:cNvPr id="27" name="PyTorch source line 14">
-              <a:extLst>
-                <a:ext uri="{FF2B5EF4-FFF2-40B4-BE49-F238E27FC236}">
-                  <a16:creationId xmlns:a16="http://schemas.microsoft.com/office/drawing/2014/main" id="{91B3631D-FB2E-4433-B66F-A0039170D450}"/>
-                </a:ext>
-              </a:extLst>
-            </p:cNvPr>
-            <p:cNvSpPr>
-              <a:spLocks noGrp="1"/>
-            </p:cNvSpPr>
-            <p:nvPr/>
-          </p:nvSpPr>
-          <p:spPr>
-            <a:xfrm>
-              <a:off x="567421" y="5495925"/>
-              <a:ext cx="2581275" cy="209550"/>
-            </a:xfrm>
-            <a:prstGeom prst="rect">
-              <a:avLst/>
-            </a:prstGeom>
+          </a:ln>
+        </p:spPr>
+        <p:txBody>
+          <a:bodyPr wrap="none" lIns="0" tIns="0" rIns="0" bIns="0" anchor="t">
+            <a:noAutofit/>
+          </a:bodyPr>
+          <a:lstStyle/>
+          <a:p>
+            <a:pPr algn="l">
+              <a:defRPr sz="1088" b="0">
+                <a:solidFill>
+                  <a:srgbClr val="131846"/>
+                </a:solidFill>
+                <a:latin typeface="Consolas"/>
+                <a:ea typeface="Consolas"/>
+                <a:cs typeface="Consolas"/>
+              </a:defRPr>
+            </a:pPr>
+            <a:r>
+              <a:rPr>
+                <a:solidFill>
+                  <a:srgbClr val="111638"/>
+                </a:solidFill>
+                <a:latin typeface="Consolas" panose="020B0609020204030204" pitchFamily="49" charset="0"/>
+                <a:cs typeface="Times New Roman" panose="02020603050405020304" pitchFamily="18" charset="0"/>
+              </a:rPr>
+              <a:t>model = </a:t>
+            </a:r>
+            <a:r>
+              <a:rPr>
+                <a:solidFill>
+                  <a:srgbClr val="005BDE"/>
+                </a:solidFill>
+                <a:latin typeface="Consolas" panose="020B0609020204030204" pitchFamily="49" charset="0"/>
+                <a:cs typeface="Times New Roman" panose="02020603050405020304" pitchFamily="18" charset="0"/>
+              </a:rPr>
+              <a:t>Net</a:t>
+            </a:r>
+            <a:r>
+              <a:rPr>
+                <a:solidFill>
+                  <a:srgbClr val="111638"/>
+                </a:solidFill>
+                <a:latin typeface="Consolas" panose="020B0609020204030204" pitchFamily="49" charset="0"/>
+                <a:cs typeface="Times New Roman" panose="02020603050405020304" pitchFamily="18" charset="0"/>
+              </a:rPr>
+              <a:t>().to(device)</a:t>
+            </a:r>
+          </a:p>
+        </p:txBody>
+      </p:sp>
+      <p:sp>
+        <p:nvSpPr>
+          <p:cNvPr id="26" name="PyTorch source line 13">
+            <a:extLst>
+              <a:ext uri="{FF2B5EF4-FFF2-40B4-BE49-F238E27FC236}">
+                <a16:creationId xmlns:a16="http://schemas.microsoft.com/office/drawing/2014/main" id="{6381B4AC-67D4-46AD-9F97-17C71AF0A032}"/>
+              </a:ext>
+            </a:extLst>
+          </p:cNvPr>
+          <p:cNvSpPr>
+            <a:spLocks noGrp="1"/>
+          </p:cNvSpPr>
+          <p:nvPr/>
+        </p:nvSpPr>
+        <p:spPr>
+          <a:xfrm>
+            <a:off x="567421" y="5200650"/>
+            <a:ext cx="2581275" cy="209550"/>
+          </a:xfrm>
+          <a:prstGeom prst="rect">
+            <a:avLst/>
+          </a:prstGeom>
+          <a:noFill/>
+          <a:ln w="0">
             <a:noFill/>
-            <a:ln w="0">
-              <a:noFill/>
-            </a:ln>
-          </p:spPr>
-          <p:txBody>
-            <a:bodyPr wrap="none" lIns="0" tIns="0" rIns="0" bIns="0" anchor="t">
-              <a:noAutofit/>
-            </a:bodyPr>
-            <a:lstStyle/>
-            <a:p>
-              <a:pPr algn="l">
-                <a:defRPr sz="1088" b="0">
-                  <a:solidFill>
-                    <a:srgbClr val="131846"/>
-                  </a:solidFill>
-                  <a:latin typeface="Consolas"/>
-                  <a:ea typeface="Consolas"/>
-                  <a:cs typeface="Consolas"/>
-                </a:defRPr>
-              </a:pPr>
-              <a:r>
-                <a:rPr>
-                  <a:solidFill>
-                    <a:srgbClr val="111638"/>
-                  </a:solidFill>
-                  <a:latin typeface="Consolas" panose="020B0609020204030204" pitchFamily="49" charset="0"/>
-                  <a:cs typeface="Times New Roman" panose="02020603050405020304" pitchFamily="18" charset="0"/>
-                </a:rPr>
-                <a:t>  loss = criterion(model(x), y)</a:t>
-              </a:r>
-            </a:p>
-          </p:txBody>
-        </p:sp>
-        <p:sp>
-          <p:nvSpPr>
-            <p:cNvPr id="28" name="PyTorch source line 15">
-              <a:extLst>
-                <a:ext uri="{FF2B5EF4-FFF2-40B4-BE49-F238E27FC236}">
-                  <a16:creationId xmlns:a16="http://schemas.microsoft.com/office/drawing/2014/main" id="{879788A5-0A9E-4C12-A11A-797D52B688A5}"/>
-                </a:ext>
-              </a:extLst>
-            </p:cNvPr>
-            <p:cNvSpPr>
-              <a:spLocks noGrp="1"/>
-            </p:cNvSpPr>
-            <p:nvPr/>
-          </p:nvSpPr>
-          <p:spPr>
-            <a:xfrm>
-              <a:off x="567421" y="5791200"/>
-              <a:ext cx="2581275" cy="209550"/>
-            </a:xfrm>
-            <a:prstGeom prst="rect">
-              <a:avLst/>
-            </a:prstGeom>
+          </a:ln>
+        </p:spPr>
+        <p:txBody>
+          <a:bodyPr wrap="none" lIns="0" tIns="0" rIns="0" bIns="0" anchor="t">
+            <a:noAutofit/>
+          </a:bodyPr>
+          <a:lstStyle/>
+          <a:p>
+            <a:pPr algn="l">
+              <a:defRPr sz="1088" b="0">
+                <a:solidFill>
+                  <a:srgbClr val="131846"/>
+                </a:solidFill>
+                <a:latin typeface="Consolas"/>
+                <a:ea typeface="Consolas"/>
+                <a:cs typeface="Consolas"/>
+              </a:defRPr>
+            </a:pPr>
+            <a:r>
+              <a:rPr>
+                <a:solidFill>
+                  <a:srgbClr val="111638"/>
+                </a:solidFill>
+                <a:latin typeface="Consolas" panose="020B0609020204030204" pitchFamily="49" charset="0"/>
+                <a:cs typeface="Times New Roman" panose="02020603050405020304" pitchFamily="18" charset="0"/>
+              </a:rPr>
+              <a:t>for x, y in loader:</a:t>
+            </a:r>
+          </a:p>
+        </p:txBody>
+      </p:sp>
+      <p:sp>
+        <p:nvSpPr>
+          <p:cNvPr id="27" name="PyTorch source line 14">
+            <a:extLst>
+              <a:ext uri="{FF2B5EF4-FFF2-40B4-BE49-F238E27FC236}">
+                <a16:creationId xmlns:a16="http://schemas.microsoft.com/office/drawing/2014/main" id="{91B3631D-FB2E-4433-B66F-A0039170D450}"/>
+              </a:ext>
+            </a:extLst>
+          </p:cNvPr>
+          <p:cNvSpPr>
+            <a:spLocks noGrp="1"/>
+          </p:cNvSpPr>
+          <p:nvPr/>
+        </p:nvSpPr>
+        <p:spPr>
+          <a:xfrm>
+            <a:off x="567421" y="5495925"/>
+            <a:ext cx="2581275" cy="209550"/>
+          </a:xfrm>
+          <a:prstGeom prst="rect">
+            <a:avLst/>
+          </a:prstGeom>
+          <a:noFill/>
+          <a:ln w="0">
             <a:noFill/>
-            <a:ln w="0">
-              <a:noFill/>
-            </a:ln>
-          </p:spPr>
-          <p:txBody>
-            <a:bodyPr wrap="none" lIns="0" tIns="0" rIns="0" bIns="0" anchor="t">
-              <a:noAutofit/>
-            </a:bodyPr>
-            <a:lstStyle/>
-            <a:p>
-              <a:pPr algn="l">
-                <a:defRPr sz="1088" b="0">
-                  <a:solidFill>
-                    <a:srgbClr val="131846"/>
-                  </a:solidFill>
-                  <a:latin typeface="Consolas"/>
-                  <a:ea typeface="Consolas"/>
-                  <a:cs typeface="Consolas"/>
-                </a:defRPr>
-              </a:pPr>
-              <a:r>
-                <a:rPr>
-                  <a:solidFill>
-                    <a:srgbClr val="111638"/>
-                  </a:solidFill>
-                  <a:latin typeface="Consolas" panose="020B0609020204030204" pitchFamily="49" charset="0"/>
-                  <a:cs typeface="Times New Roman" panose="02020603050405020304" pitchFamily="18" charset="0"/>
-                </a:rPr>
-                <a:t>  loss.backward()</a:t>
-              </a:r>
-            </a:p>
-          </p:txBody>
-        </p:sp>
-        <p:sp>
-          <p:nvSpPr>
-            <p:cNvPr id="29" name="PyTorch source line 16">
-              <a:extLst>
-                <a:ext uri="{FF2B5EF4-FFF2-40B4-BE49-F238E27FC236}">
-                  <a16:creationId xmlns:a16="http://schemas.microsoft.com/office/drawing/2014/main" id="{665D1A04-F15C-4010-B634-59B9B457C7E4}"/>
-                </a:ext>
-              </a:extLst>
-            </p:cNvPr>
-            <p:cNvSpPr>
-              <a:spLocks noGrp="1"/>
-            </p:cNvSpPr>
-            <p:nvPr/>
-          </p:nvSpPr>
-          <p:spPr>
-            <a:xfrm>
-              <a:off x="567421" y="6086475"/>
-              <a:ext cx="2581275" cy="209550"/>
-            </a:xfrm>
-            <a:prstGeom prst="rect">
-              <a:avLst/>
-            </a:prstGeom>
+          </a:ln>
+        </p:spPr>
+        <p:txBody>
+          <a:bodyPr wrap="none" lIns="0" tIns="0" rIns="0" bIns="0" anchor="t">
+            <a:noAutofit/>
+          </a:bodyPr>
+          <a:lstStyle/>
+          <a:p>
+            <a:pPr algn="l">
+              <a:defRPr sz="1088" b="0">
+                <a:solidFill>
+                  <a:srgbClr val="131846"/>
+                </a:solidFill>
+                <a:latin typeface="Consolas"/>
+                <a:ea typeface="Consolas"/>
+                <a:cs typeface="Consolas"/>
+              </a:defRPr>
+            </a:pPr>
+            <a:r>
+              <a:rPr>
+                <a:solidFill>
+                  <a:srgbClr val="111638"/>
+                </a:solidFill>
+                <a:latin typeface="Consolas" panose="020B0609020204030204" pitchFamily="49" charset="0"/>
+                <a:cs typeface="Times New Roman" panose="02020603050405020304" pitchFamily="18" charset="0"/>
+              </a:rPr>
+              <a:t>  loss = criterion(model(x), y)</a:t>
+            </a:r>
+          </a:p>
+        </p:txBody>
+      </p:sp>
+      <p:sp>
+        <p:nvSpPr>
+          <p:cNvPr id="28" name="PyTorch source line 15">
+            <a:extLst>
+              <a:ext uri="{FF2B5EF4-FFF2-40B4-BE49-F238E27FC236}">
+                <a16:creationId xmlns:a16="http://schemas.microsoft.com/office/drawing/2014/main" id="{879788A5-0A9E-4C12-A11A-797D52B688A5}"/>
+              </a:ext>
+            </a:extLst>
+          </p:cNvPr>
+          <p:cNvSpPr>
+            <a:spLocks noGrp="1"/>
+          </p:cNvSpPr>
+          <p:nvPr/>
+        </p:nvSpPr>
+        <p:spPr>
+          <a:xfrm>
+            <a:off x="567421" y="5791200"/>
+            <a:ext cx="2581275" cy="209550"/>
+          </a:xfrm>
+          <a:prstGeom prst="rect">
+            <a:avLst/>
+          </a:prstGeom>
+          <a:noFill/>
+          <a:ln w="0">
             <a:noFill/>
-            <a:ln w="0">
-              <a:noFill/>
-            </a:ln>
-          </p:spPr>
-          <p:txBody>
-            <a:bodyPr wrap="none" lIns="0" tIns="0" rIns="0" bIns="0" anchor="t">
-              <a:noAutofit/>
-            </a:bodyPr>
-            <a:lstStyle/>
-            <a:p>
-              <a:pPr algn="l">
-                <a:defRPr sz="1088" b="0">
-                  <a:solidFill>
-                    <a:srgbClr val="131846"/>
-                  </a:solidFill>
-                  <a:latin typeface="Consolas"/>
-                  <a:ea typeface="Consolas"/>
-                  <a:cs typeface="Consolas"/>
-                </a:defRPr>
-              </a:pPr>
-              <a:r>
-                <a:rPr dirty="0">
-                  <a:solidFill>
-                    <a:srgbClr val="111638"/>
-                  </a:solidFill>
-                  <a:latin typeface="Consolas" panose="020B0609020204030204" pitchFamily="49" charset="0"/>
-                  <a:cs typeface="Times New Roman" panose="02020603050405020304" pitchFamily="18" charset="0"/>
-                </a:rPr>
-                <a:t>  </a:t>
-              </a:r>
-              <a:r>
-                <a:rPr dirty="0" err="1">
-                  <a:solidFill>
-                    <a:srgbClr val="111638"/>
-                  </a:solidFill>
-                  <a:latin typeface="Consolas" panose="020B0609020204030204" pitchFamily="49" charset="0"/>
-                  <a:cs typeface="Times New Roman" panose="02020603050405020304" pitchFamily="18" charset="0"/>
-                </a:rPr>
-                <a:t>optimizer.step</a:t>
-              </a:r>
-              <a:r>
-                <a:rPr dirty="0">
-                  <a:solidFill>
-                    <a:srgbClr val="111638"/>
-                  </a:solidFill>
-                  <a:latin typeface="Consolas" panose="020B0609020204030204" pitchFamily="49" charset="0"/>
-                  <a:cs typeface="Times New Roman" panose="02020603050405020304" pitchFamily="18" charset="0"/>
-                </a:rPr>
-                <a:t>()</a:t>
-              </a:r>
-            </a:p>
-          </p:txBody>
-        </p:sp>
-      </p:grpSp>
+          </a:ln>
+        </p:spPr>
+        <p:txBody>
+          <a:bodyPr wrap="none" lIns="0" tIns="0" rIns="0" bIns="0" anchor="t">
+            <a:noAutofit/>
+          </a:bodyPr>
+          <a:lstStyle/>
+          <a:p>
+            <a:pPr algn="l">
+              <a:defRPr sz="1088" b="0">
+                <a:solidFill>
+                  <a:srgbClr val="131846"/>
+                </a:solidFill>
+                <a:latin typeface="Consolas"/>
+                <a:ea typeface="Consolas"/>
+                <a:cs typeface="Consolas"/>
+              </a:defRPr>
+            </a:pPr>
+            <a:r>
+              <a:rPr>
+                <a:solidFill>
+                  <a:srgbClr val="111638"/>
+                </a:solidFill>
+                <a:latin typeface="Consolas" panose="020B0609020204030204" pitchFamily="49" charset="0"/>
+                <a:cs typeface="Times New Roman" panose="02020603050405020304" pitchFamily="18" charset="0"/>
+              </a:rPr>
+              <a:t>  loss.backward()</a:t>
+            </a:r>
+          </a:p>
+        </p:txBody>
+      </p:sp>
+      <p:sp>
+        <p:nvSpPr>
+          <p:cNvPr id="29" name="PyTorch source line 16">
+            <a:extLst>
+              <a:ext uri="{FF2B5EF4-FFF2-40B4-BE49-F238E27FC236}">
+                <a16:creationId xmlns:a16="http://schemas.microsoft.com/office/drawing/2014/main" id="{665D1A04-F15C-4010-B634-59B9B457C7E4}"/>
+              </a:ext>
+            </a:extLst>
+          </p:cNvPr>
+          <p:cNvSpPr>
+            <a:spLocks noGrp="1"/>
+          </p:cNvSpPr>
+          <p:nvPr/>
+        </p:nvSpPr>
+        <p:spPr>
+          <a:xfrm>
+            <a:off x="567421" y="6086475"/>
+            <a:ext cx="2581275" cy="209550"/>
+          </a:xfrm>
+          <a:prstGeom prst="rect">
+            <a:avLst/>
+          </a:prstGeom>
+          <a:noFill/>
+          <a:ln w="0">
+            <a:noFill/>
+          </a:ln>
+        </p:spPr>
+        <p:txBody>
+          <a:bodyPr wrap="none" lIns="0" tIns="0" rIns="0" bIns="0" anchor="t">
+            <a:noAutofit/>
+          </a:bodyPr>
+          <a:lstStyle/>
+          <a:p>
+            <a:pPr algn="l">
+              <a:defRPr sz="1088" b="0">
+                <a:solidFill>
+                  <a:srgbClr val="131846"/>
+                </a:solidFill>
+                <a:latin typeface="Consolas"/>
+                <a:ea typeface="Consolas"/>
+                <a:cs typeface="Consolas"/>
+              </a:defRPr>
+            </a:pPr>
+            <a:r>
+              <a:rPr dirty="0">
+                <a:solidFill>
+                  <a:srgbClr val="111638"/>
+                </a:solidFill>
+                <a:latin typeface="Consolas" panose="020B0609020204030204" pitchFamily="49" charset="0"/>
+                <a:cs typeface="Times New Roman" panose="02020603050405020304" pitchFamily="18" charset="0"/>
+              </a:rPr>
+              <a:t>  </a:t>
+            </a:r>
+            <a:r>
+              <a:rPr dirty="0" err="1">
+                <a:solidFill>
+                  <a:srgbClr val="111638"/>
+                </a:solidFill>
+                <a:latin typeface="Consolas" panose="020B0609020204030204" pitchFamily="49" charset="0"/>
+                <a:cs typeface="Times New Roman" panose="02020603050405020304" pitchFamily="18" charset="0"/>
+              </a:rPr>
+              <a:t>optimizer.step</a:t>
+            </a:r>
+            <a:r>
+              <a:rPr dirty="0">
+                <a:solidFill>
+                  <a:srgbClr val="111638"/>
+                </a:solidFill>
+                <a:latin typeface="Consolas" panose="020B0609020204030204" pitchFamily="49" charset="0"/>
+                <a:cs typeface="Times New Roman" panose="02020603050405020304" pitchFamily="18" charset="0"/>
+              </a:rPr>
+              <a:t>()</a:t>
+            </a:r>
+          </a:p>
+        </p:txBody>
+      </p:sp>
       <p:grpSp>
         <p:nvGrpSpPr>
           <p:cNvPr id="361" name="Task requirements"/>
@@ -20961,1026 +20951,996 @@
           </p:txBody>
         </p:sp>
       </p:grpSp>
-      <p:grpSp>
-        <p:nvGrpSpPr>
-          <p:cNvPr id="371" name="MindSpore framework"/>
-          <p:cNvGrpSpPr/>
+      <p:sp>
+        <p:nvSpPr>
+          <p:cNvPr id="267" name="MindSpore outer card">
+            <a:extLst>
+              <a:ext uri="{FF2B5EF4-FFF2-40B4-BE49-F238E27FC236}">
+                <a16:creationId xmlns:a16="http://schemas.microsoft.com/office/drawing/2014/main" id="{3669AF5F-AF4B-4D03-B12D-E3565C29F9C3}"/>
+              </a:ext>
+            </a:extLst>
+          </p:cNvPr>
+          <p:cNvSpPr>
+            <a:spLocks noGrp="1"/>
+          </p:cNvSpPr>
           <p:nvPr/>
-        </p:nvGrpSpPr>
-        <p:grpSpPr>
+        </p:nvSpPr>
+        <p:spPr>
           <a:xfrm>
             <a:off x="12725400" y="1209675"/>
             <a:ext cx="2924175" cy="1590675"/>
-            <a:chOff x="12725400" y="1209675"/>
-            <a:chExt cx="2924175" cy="1590675"/>
           </a:xfrm>
-        </p:grpSpPr>
-        <p:sp>
-          <p:nvSpPr>
-            <p:cNvPr id="267" name="MindSpore outer card">
-              <a:extLst>
-                <a:ext uri="{FF2B5EF4-FFF2-40B4-BE49-F238E27FC236}">
-                  <a16:creationId xmlns:a16="http://schemas.microsoft.com/office/drawing/2014/main" id="{3669AF5F-AF4B-4D03-B12D-E3565C29F9C3}"/>
-                </a:ext>
-              </a:extLst>
-            </p:cNvPr>
-            <p:cNvSpPr>
-              <a:spLocks noGrp="1"/>
-            </p:cNvSpPr>
-            <p:nvPr/>
-          </p:nvSpPr>
-          <p:spPr>
-            <a:xfrm>
-              <a:off x="12725400" y="1209675"/>
-              <a:ext cx="2924175" cy="1590675"/>
-            </a:xfrm>
-            <a:prstGeom prst="roundRect">
-              <a:avLst>
-                <a:gd name="adj" fmla="val 8982"/>
-              </a:avLst>
-            </a:prstGeom>
+          <a:prstGeom prst="roundRect">
+            <a:avLst>
+              <a:gd name="adj" fmla="val 8982"/>
+            </a:avLst>
+          </a:prstGeom>
+          <a:solidFill>
+            <a:srgbClr val="FCFEFF"/>
+          </a:solidFill>
+          <a:ln w="13335">
             <a:solidFill>
-              <a:srgbClr val="FCFEFF"/>
+              <a:srgbClr val="C6E1E5"/>
             </a:solidFill>
-            <a:ln w="13335">
-              <a:solidFill>
-                <a:srgbClr val="C6E1E5"/>
-              </a:solidFill>
-            </a:ln>
-          </p:spPr>
-        </p:sp>
-        <p:sp>
-          <p:nvSpPr>
-            <p:cNvPr id="268" name="MindSpore inner card">
-              <a:extLst>
-                <a:ext uri="{FF2B5EF4-FFF2-40B4-BE49-F238E27FC236}">
-                  <a16:creationId xmlns:a16="http://schemas.microsoft.com/office/drawing/2014/main" id="{D3142D9E-E528-4262-AC8C-4F83D607B587}"/>
-                </a:ext>
-              </a:extLst>
-            </p:cNvPr>
-            <p:cNvSpPr>
-              <a:spLocks noGrp="1"/>
-            </p:cNvSpPr>
-            <p:nvPr/>
-          </p:nvSpPr>
-          <p:spPr>
-            <a:xfrm>
-              <a:off x="12811125" y="1285875"/>
-              <a:ext cx="2743200" cy="1428750"/>
-            </a:xfrm>
-            <a:prstGeom prst="roundRect">
-              <a:avLst>
-                <a:gd name="adj" fmla="val 11333"/>
-              </a:avLst>
-            </a:prstGeom>
-            <a:gradFill>
-              <a:gsLst>
-                <a:gs pos="0">
-                  <a:srgbClr val="EEF7FF"/>
-                </a:gs>
-                <a:gs pos="100000">
-                  <a:srgbClr val="E2F0FF"/>
-                </a:gs>
-              </a:gsLst>
-              <a:lin ang="5400000"/>
-            </a:gradFill>
-            <a:ln w="0">
-              <a:noFill/>
-            </a:ln>
-          </p:spPr>
-        </p:sp>
-        <p:pic>
-          <p:nvPicPr>
-            <p:cNvPr id="376" name="mindspore official logo" descr="https://www.mindspore.cn/_static/logo-zh-light.Bh-KLwUB.svg | Original SVG bytes; proportional crop of the official symbol."/>
-            <p:cNvPicPr>
-              <a:picLocks noChangeAspect="1"/>
-            </p:cNvPicPr>
-            <p:nvPr/>
-          </p:nvPicPr>
-          <p:blipFill>
-            <a:blip>
-              <a:extLst>
-                <a:ext uri="{96DAC541-7B7A-43D3-8B79-37D633B846F1}">
-                  <asvg:svgBlip xmlns:asvg="http://schemas.microsoft.com/office/drawing/2016/SVG/main" r:embed="rId4"/>
-                </a:ext>
-              </a:extLst>
-            </a:blip>
-            <a:srcRect/>
-            <a:stretch>
-              <a:fillRect/>
-            </a:stretch>
-          </p:blipFill>
-          <p:spPr>
-            <a:xfrm>
-              <a:off x="12963525" y="1457325"/>
-              <a:ext cx="895350" cy="499730"/>
-            </a:xfrm>
-            <a:prstGeom prst="rect">
-              <a:avLst/>
-            </a:prstGeom>
-          </p:spPr>
-        </p:pic>
-        <p:sp>
-          <p:nvSpPr>
-            <p:cNvPr id="271" name="MindSpore name">
-              <a:extLst>
-                <a:ext uri="{FF2B5EF4-FFF2-40B4-BE49-F238E27FC236}">
-                  <a16:creationId xmlns:a16="http://schemas.microsoft.com/office/drawing/2014/main" id="{5080076A-5E8D-4463-8A2E-7550D0FCD4B4}"/>
-                </a:ext>
-              </a:extLst>
-            </p:cNvPr>
-            <p:cNvSpPr>
-              <a:spLocks noGrp="1"/>
-            </p:cNvSpPr>
-            <p:nvPr/>
-          </p:nvSpPr>
-          <p:spPr>
-            <a:xfrm>
-              <a:off x="13973175" y="1409700"/>
-              <a:ext cx="1562100" cy="323850"/>
-            </a:xfrm>
-            <a:prstGeom prst="rect">
-              <a:avLst/>
-            </a:prstGeom>
+          </a:ln>
+        </p:spPr>
+      </p:sp>
+      <p:sp>
+        <p:nvSpPr>
+          <p:cNvPr id="268" name="MindSpore inner card">
+            <a:extLst>
+              <a:ext uri="{FF2B5EF4-FFF2-40B4-BE49-F238E27FC236}">
+                <a16:creationId xmlns:a16="http://schemas.microsoft.com/office/drawing/2014/main" id="{D3142D9E-E528-4262-AC8C-4F83D607B587}"/>
+              </a:ext>
+            </a:extLst>
+          </p:cNvPr>
+          <p:cNvSpPr>
+            <a:spLocks noGrp="1"/>
+          </p:cNvSpPr>
+          <p:nvPr/>
+        </p:nvSpPr>
+        <p:spPr>
+          <a:xfrm>
+            <a:off x="12811125" y="1285875"/>
+            <a:ext cx="2743200" cy="1428750"/>
+          </a:xfrm>
+          <a:prstGeom prst="roundRect">
+            <a:avLst>
+              <a:gd name="adj" fmla="val 11333"/>
+            </a:avLst>
+          </a:prstGeom>
+          <a:gradFill>
+            <a:gsLst>
+              <a:gs pos="0">
+                <a:srgbClr val="EEF7FF"/>
+              </a:gs>
+              <a:gs pos="100000">
+                <a:srgbClr val="E2F0FF"/>
+              </a:gs>
+            </a:gsLst>
+            <a:lin ang="5400000"/>
+          </a:gradFill>
+          <a:ln w="0">
             <a:noFill/>
-            <a:ln w="0">
-              <a:noFill/>
-            </a:ln>
-          </p:spPr>
-          <p:txBody>
-            <a:bodyPr wrap="none" lIns="0" tIns="0" rIns="0" bIns="0" anchor="t">
-              <a:noAutofit/>
-            </a:bodyPr>
-            <a:lstStyle/>
-            <a:p>
-              <a:pPr algn="l">
-                <a:defRPr sz="2025" b="1">
-                  <a:solidFill>
-                    <a:srgbClr val="0D1648"/>
-                  </a:solidFill>
-                  <a:latin typeface="Arial Narrow"/>
-                  <a:ea typeface="Arial Narrow"/>
-                  <a:cs typeface="Arial Narrow"/>
-                </a:defRPr>
-              </a:pPr>
-              <a:r>
-                <a:rPr sz="2025" b="1">
-                  <a:solidFill>
-                    <a:srgbClr val="0D1648"/>
-                  </a:solidFill>
-                  <a:latin typeface="Times New Roman" panose="02020603050405020304" pitchFamily="18" charset="0"/>
-                  <a:ea typeface="Arial Narrow"/>
-                  <a:cs typeface="Times New Roman" panose="02020603050405020304" pitchFamily="18" charset="0"/>
-                </a:rPr>
-                <a:t>MindSpore</a:t>
-              </a:r>
-            </a:p>
-          </p:txBody>
-        </p:sp>
-        <p:sp>
-          <p:nvSpPr>
-            <p:cNvPr id="272" name="MindSpore adapter">
-              <a:extLst>
-                <a:ext uri="{FF2B5EF4-FFF2-40B4-BE49-F238E27FC236}">
-                  <a16:creationId xmlns:a16="http://schemas.microsoft.com/office/drawing/2014/main" id="{5CCE402F-EA2D-448D-8A66-48D454A17690}"/>
-                </a:ext>
-              </a:extLst>
-            </p:cNvPr>
-            <p:cNvSpPr>
-              <a:spLocks noGrp="1"/>
-            </p:cNvSpPr>
-            <p:nvPr/>
-          </p:nvSpPr>
-          <p:spPr>
-            <a:xfrm>
-              <a:off x="14020800" y="1685925"/>
-              <a:ext cx="1524000" cy="266700"/>
-            </a:xfrm>
-            <a:prstGeom prst="rect">
-              <a:avLst/>
-            </a:prstGeom>
+          </a:ln>
+        </p:spPr>
+      </p:sp>
+      <p:pic>
+        <p:nvPicPr>
+          <p:cNvPr id="376" name="mindspore official logo" descr="https://www.mindspore.cn/_static/logo-zh-light.Bh-KLwUB.svg | Original SVG bytes; proportional crop of the official symbol."/>
+          <p:cNvPicPr>
+            <a:picLocks noChangeAspect="1"/>
+          </p:cNvPicPr>
+          <p:nvPr/>
+        </p:nvPicPr>
+        <p:blipFill>
+          <a:blip>
+            <a:extLst>
+              <a:ext uri="{96DAC541-7B7A-43D3-8B79-37D633B846F1}">
+                <asvg:svgBlip xmlns:asvg="http://schemas.microsoft.com/office/drawing/2016/SVG/main" r:embed="rId4"/>
+              </a:ext>
+            </a:extLst>
+          </a:blip>
+          <a:srcRect/>
+          <a:stretch>
+            <a:fillRect/>
+          </a:stretch>
+        </p:blipFill>
+        <p:spPr>
+          <a:xfrm>
+            <a:off x="12963525" y="1457325"/>
+            <a:ext cx="895350" cy="499730"/>
+          </a:xfrm>
+          <a:prstGeom prst="rect">
+            <a:avLst/>
+          </a:prstGeom>
+        </p:spPr>
+      </p:pic>
+      <p:sp>
+        <p:nvSpPr>
+          <p:cNvPr id="271" name="MindSpore name">
+            <a:extLst>
+              <a:ext uri="{FF2B5EF4-FFF2-40B4-BE49-F238E27FC236}">
+                <a16:creationId xmlns:a16="http://schemas.microsoft.com/office/drawing/2014/main" id="{5080076A-5E8D-4463-8A2E-7550D0FCD4B4}"/>
+              </a:ext>
+            </a:extLst>
+          </p:cNvPr>
+          <p:cNvSpPr>
+            <a:spLocks noGrp="1"/>
+          </p:cNvSpPr>
+          <p:nvPr/>
+        </p:nvSpPr>
+        <p:spPr>
+          <a:xfrm>
+            <a:off x="13973175" y="1409700"/>
+            <a:ext cx="1562100" cy="323850"/>
+          </a:xfrm>
+          <a:prstGeom prst="rect">
+            <a:avLst/>
+          </a:prstGeom>
+          <a:noFill/>
+          <a:ln w="0">
             <a:noFill/>
-            <a:ln w="0">
-              <a:noFill/>
-            </a:ln>
-          </p:spPr>
-          <p:txBody>
-            <a:bodyPr wrap="none" lIns="0" tIns="0" rIns="0" bIns="0" anchor="t">
-              <a:noAutofit/>
-            </a:bodyPr>
-            <a:lstStyle/>
-            <a:p>
-              <a:pPr algn="l">
-                <a:defRPr sz="1650" b="0">
-                  <a:solidFill>
-                    <a:srgbClr val="15306E"/>
-                  </a:solidFill>
-                  <a:latin typeface="Arial Narrow"/>
-                  <a:ea typeface="Arial Narrow"/>
-                  <a:cs typeface="Arial Narrow"/>
-                </a:defRPr>
-              </a:pPr>
-              <a:r>
-                <a:rPr sz="1650" b="0">
-                  <a:solidFill>
-                    <a:srgbClr val="15306E"/>
-                  </a:solidFill>
-                  <a:latin typeface="Times New Roman" panose="02020603050405020304" pitchFamily="18" charset="0"/>
-                  <a:ea typeface="Arial Narrow"/>
-                  <a:cs typeface="Times New Roman" panose="02020603050405020304" pitchFamily="18" charset="0"/>
-                </a:rPr>
-                <a:t>via torch4ms</a:t>
-              </a:r>
-            </a:p>
-          </p:txBody>
-        </p:sp>
-        <p:sp>
-          <p:nvSpPr>
-            <p:cNvPr id="273" name="MindSpore run strip">
-              <a:extLst>
-                <a:ext uri="{FF2B5EF4-FFF2-40B4-BE49-F238E27FC236}">
-                  <a16:creationId xmlns:a16="http://schemas.microsoft.com/office/drawing/2014/main" id="{A3BC3642-E09E-4057-BC64-0EB2A66DB3C6}"/>
-                </a:ext>
-              </a:extLst>
-            </p:cNvPr>
-            <p:cNvSpPr>
-              <a:spLocks noGrp="1"/>
-            </p:cNvSpPr>
-            <p:nvPr/>
-          </p:nvSpPr>
-          <p:spPr>
-            <a:xfrm>
-              <a:off x="12954000" y="2162175"/>
-              <a:ext cx="2457450" cy="438150"/>
-            </a:xfrm>
-            <a:prstGeom prst="roundRect">
-              <a:avLst>
-                <a:gd name="adj" fmla="val 21739"/>
-              </a:avLst>
-            </a:prstGeom>
-            <a:gradFill>
-              <a:gsLst>
-                <a:gs pos="0">
-                  <a:srgbClr val="D9E9FC"/>
-                </a:gs>
-                <a:gs pos="100000">
-                  <a:srgbClr val="DBEBFD"/>
-                </a:gs>
-              </a:gsLst>
-              <a:lin ang="5400000"/>
-            </a:gradFill>
-            <a:ln w="0">
-              <a:noFill/>
-            </a:ln>
-          </p:spPr>
-        </p:sp>
-        <p:sp>
-          <p:nvSpPr>
-            <p:cNvPr id="274" name="MindSpore code button">
-              <a:extLst>
-                <a:ext uri="{FF2B5EF4-FFF2-40B4-BE49-F238E27FC236}">
-                  <a16:creationId xmlns:a16="http://schemas.microsoft.com/office/drawing/2014/main" id="{4CC745E6-2021-499E-8D9C-7976F92487EB}"/>
-                </a:ext>
-              </a:extLst>
-            </p:cNvPr>
-            <p:cNvSpPr>
-              <a:spLocks noGrp="1"/>
-            </p:cNvSpPr>
-            <p:nvPr/>
-          </p:nvSpPr>
-          <p:spPr>
-            <a:xfrm>
-              <a:off x="13134975" y="2247900"/>
-              <a:ext cx="285750" cy="276225"/>
-            </a:xfrm>
-            <a:prstGeom prst="roundRect">
-              <a:avLst>
-                <a:gd name="adj" fmla="val 17241"/>
-              </a:avLst>
-            </a:prstGeom>
+          </a:ln>
+        </p:spPr>
+        <p:txBody>
+          <a:bodyPr wrap="none" lIns="0" tIns="0" rIns="0" bIns="0" anchor="t">
+            <a:noAutofit/>
+          </a:bodyPr>
+          <a:lstStyle/>
+          <a:p>
+            <a:pPr algn="l">
+              <a:defRPr sz="2025" b="1">
+                <a:solidFill>
+                  <a:srgbClr val="0D1648"/>
+                </a:solidFill>
+                <a:latin typeface="Arial Narrow"/>
+                <a:ea typeface="Arial Narrow"/>
+                <a:cs typeface="Arial Narrow"/>
+              </a:defRPr>
+            </a:pPr>
+            <a:r>
+              <a:rPr sz="2025" b="1">
+                <a:solidFill>
+                  <a:srgbClr val="0D1648"/>
+                </a:solidFill>
+                <a:latin typeface="Times New Roman" panose="02020603050405020304" pitchFamily="18" charset="0"/>
+                <a:ea typeface="Arial Narrow"/>
+                <a:cs typeface="Times New Roman" panose="02020603050405020304" pitchFamily="18" charset="0"/>
+              </a:rPr>
+              <a:t>MindSpore</a:t>
+            </a:r>
+          </a:p>
+        </p:txBody>
+      </p:sp>
+      <p:sp>
+        <p:nvSpPr>
+          <p:cNvPr id="272" name="MindSpore adapter">
+            <a:extLst>
+              <a:ext uri="{FF2B5EF4-FFF2-40B4-BE49-F238E27FC236}">
+                <a16:creationId xmlns:a16="http://schemas.microsoft.com/office/drawing/2014/main" id="{5CCE402F-EA2D-448D-8A66-48D454A17690}"/>
+              </a:ext>
+            </a:extLst>
+          </p:cNvPr>
+          <p:cNvSpPr>
+            <a:spLocks noGrp="1"/>
+          </p:cNvSpPr>
+          <p:nvPr/>
+        </p:nvSpPr>
+        <p:spPr>
+          <a:xfrm>
+            <a:off x="14020800" y="1685925"/>
+            <a:ext cx="1524000" cy="266700"/>
+          </a:xfrm>
+          <a:prstGeom prst="rect">
+            <a:avLst/>
+          </a:prstGeom>
+          <a:noFill/>
+          <a:ln w="0">
+            <a:noFill/>
+          </a:ln>
+        </p:spPr>
+        <p:txBody>
+          <a:bodyPr wrap="none" lIns="0" tIns="0" rIns="0" bIns="0" anchor="t">
+            <a:noAutofit/>
+          </a:bodyPr>
+          <a:lstStyle/>
+          <a:p>
+            <a:pPr algn="l">
+              <a:defRPr sz="1650" b="0">
+                <a:solidFill>
+                  <a:srgbClr val="15306E"/>
+                </a:solidFill>
+                <a:latin typeface="Arial Narrow"/>
+                <a:ea typeface="Arial Narrow"/>
+                <a:cs typeface="Arial Narrow"/>
+              </a:defRPr>
+            </a:pPr>
+            <a:r>
+              <a:rPr sz="1650" b="0">
+                <a:solidFill>
+                  <a:srgbClr val="15306E"/>
+                </a:solidFill>
+                <a:latin typeface="Times New Roman" panose="02020603050405020304" pitchFamily="18" charset="0"/>
+                <a:ea typeface="Arial Narrow"/>
+                <a:cs typeface="Times New Roman" panose="02020603050405020304" pitchFamily="18" charset="0"/>
+              </a:rPr>
+              <a:t>via torch4ms</a:t>
+            </a:r>
+          </a:p>
+        </p:txBody>
+      </p:sp>
+      <p:sp>
+        <p:nvSpPr>
+          <p:cNvPr id="273" name="MindSpore run strip">
+            <a:extLst>
+              <a:ext uri="{FF2B5EF4-FFF2-40B4-BE49-F238E27FC236}">
+                <a16:creationId xmlns:a16="http://schemas.microsoft.com/office/drawing/2014/main" id="{A3BC3642-E09E-4057-BC64-0EB2A66DB3C6}"/>
+              </a:ext>
+            </a:extLst>
+          </p:cNvPr>
+          <p:cNvSpPr>
+            <a:spLocks noGrp="1"/>
+          </p:cNvSpPr>
+          <p:nvPr/>
+        </p:nvSpPr>
+        <p:spPr>
+          <a:xfrm>
+            <a:off x="12954000" y="2162175"/>
+            <a:ext cx="2457450" cy="438150"/>
+          </a:xfrm>
+          <a:prstGeom prst="roundRect">
+            <a:avLst>
+              <a:gd name="adj" fmla="val 21739"/>
+            </a:avLst>
+          </a:prstGeom>
+          <a:gradFill>
+            <a:gsLst>
+              <a:gs pos="0">
+                <a:srgbClr val="D9E9FC"/>
+              </a:gs>
+              <a:gs pos="100000">
+                <a:srgbClr val="DBEBFD"/>
+              </a:gs>
+            </a:gsLst>
+            <a:lin ang="5400000"/>
+          </a:gradFill>
+          <a:ln w="0">
+            <a:noFill/>
+          </a:ln>
+        </p:spPr>
+      </p:sp>
+      <p:sp>
+        <p:nvSpPr>
+          <p:cNvPr id="274" name="MindSpore code button">
+            <a:extLst>
+              <a:ext uri="{FF2B5EF4-FFF2-40B4-BE49-F238E27FC236}">
+                <a16:creationId xmlns:a16="http://schemas.microsoft.com/office/drawing/2014/main" id="{4CC745E6-2021-499E-8D9C-7976F92487EB}"/>
+              </a:ext>
+            </a:extLst>
+          </p:cNvPr>
+          <p:cNvSpPr>
+            <a:spLocks noGrp="1"/>
+          </p:cNvSpPr>
+          <p:nvPr/>
+        </p:nvSpPr>
+        <p:spPr>
+          <a:xfrm>
+            <a:off x="13134975" y="2247900"/>
+            <a:ext cx="285750" cy="276225"/>
+          </a:xfrm>
+          <a:prstGeom prst="roundRect">
+            <a:avLst>
+              <a:gd name="adj" fmla="val 17241"/>
+            </a:avLst>
+          </a:prstGeom>
+          <a:solidFill>
+            <a:srgbClr val="EFF3F8"/>
+          </a:solidFill>
+          <a:ln w="13335">
             <a:solidFill>
-              <a:srgbClr val="EFF3F8"/>
+              <a:srgbClr val="929DAA"/>
             </a:solidFill>
-            <a:ln w="13335">
-              <a:solidFill>
-                <a:srgbClr val="929DAA"/>
-              </a:solidFill>
-            </a:ln>
-          </p:spPr>
-        </p:sp>
-        <p:sp>
-          <p:nvSpPr>
-            <p:cNvPr id="275" name="MindSpore run code glyph">
-              <a:extLst>
-                <a:ext uri="{FF2B5EF4-FFF2-40B4-BE49-F238E27FC236}">
-                  <a16:creationId xmlns:a16="http://schemas.microsoft.com/office/drawing/2014/main" id="{E491F369-7060-4B00-83BE-6A359A17C3D2}"/>
-                </a:ext>
-              </a:extLst>
-            </p:cNvPr>
-            <p:cNvSpPr>
-              <a:spLocks noGrp="1"/>
-            </p:cNvSpPr>
-            <p:nvPr/>
-          </p:nvSpPr>
-          <p:spPr>
-            <a:xfrm>
-              <a:off x="13154025" y="2266950"/>
-              <a:ext cx="257175" cy="219075"/>
-            </a:xfrm>
-            <a:prstGeom prst="rect">
-              <a:avLst/>
-            </a:prstGeom>
+          </a:ln>
+        </p:spPr>
+      </p:sp>
+      <p:sp>
+        <p:nvSpPr>
+          <p:cNvPr id="275" name="MindSpore run code glyph">
+            <a:extLst>
+              <a:ext uri="{FF2B5EF4-FFF2-40B4-BE49-F238E27FC236}">
+                <a16:creationId xmlns:a16="http://schemas.microsoft.com/office/drawing/2014/main" id="{E491F369-7060-4B00-83BE-6A359A17C3D2}"/>
+              </a:ext>
+            </a:extLst>
+          </p:cNvPr>
+          <p:cNvSpPr>
+            <a:spLocks noGrp="1"/>
+          </p:cNvSpPr>
+          <p:nvPr/>
+        </p:nvSpPr>
+        <p:spPr>
+          <a:xfrm>
+            <a:off x="13154025" y="2266950"/>
+            <a:ext cx="257175" cy="219075"/>
+          </a:xfrm>
+          <a:prstGeom prst="rect">
+            <a:avLst/>
+          </a:prstGeom>
+          <a:noFill/>
+          <a:ln w="0">
             <a:noFill/>
-            <a:ln w="0">
-              <a:noFill/>
-            </a:ln>
-          </p:spPr>
-          <p:txBody>
-            <a:bodyPr wrap="none" lIns="0" tIns="0" rIns="0" bIns="0" anchor="t">
-              <a:noAutofit/>
-            </a:bodyPr>
-            <a:lstStyle/>
-            <a:p>
-              <a:pPr algn="ctr">
-                <a:defRPr sz="1275" b="1">
-                  <a:solidFill>
-                    <a:srgbClr val="626E7E"/>
-                  </a:solidFill>
-                  <a:latin typeface="Consolas"/>
-                  <a:ea typeface="Consolas"/>
-                  <a:cs typeface="Consolas"/>
-                </a:defRPr>
-              </a:pPr>
-              <a:r>
-                <a:rPr sz="1275" b="1">
-                  <a:solidFill>
-                    <a:srgbClr val="626E7E"/>
-                  </a:solidFill>
-                  <a:latin typeface="Times New Roman" panose="02020603050405020304" pitchFamily="18" charset="0"/>
-                  <a:ea typeface="Consolas"/>
-                  <a:cs typeface="Times New Roman" panose="02020603050405020304" pitchFamily="18" charset="0"/>
-                </a:rPr>
-                <a:t>&lt;/&gt;</a:t>
-              </a:r>
-            </a:p>
-          </p:txBody>
-        </p:sp>
-        <p:sp>
-          <p:nvSpPr>
-            <p:cNvPr id="276" name="MindSpore run text">
-              <a:extLst>
-                <a:ext uri="{FF2B5EF4-FFF2-40B4-BE49-F238E27FC236}">
-                  <a16:creationId xmlns:a16="http://schemas.microsoft.com/office/drawing/2014/main" id="{D54E9745-0CCB-434F-A217-5ED94AC51AEF}"/>
-                </a:ext>
-              </a:extLst>
-            </p:cNvPr>
-            <p:cNvSpPr>
-              <a:spLocks noGrp="1"/>
-            </p:cNvSpPr>
-            <p:nvPr/>
-          </p:nvSpPr>
-          <p:spPr>
-            <a:xfrm>
-              <a:off x="13611225" y="2266950"/>
-              <a:ext cx="1276350" cy="266700"/>
-            </a:xfrm>
-            <a:prstGeom prst="rect">
-              <a:avLst/>
-            </a:prstGeom>
+          </a:ln>
+        </p:spPr>
+        <p:txBody>
+          <a:bodyPr wrap="none" lIns="0" tIns="0" rIns="0" bIns="0" anchor="t">
+            <a:noAutofit/>
+          </a:bodyPr>
+          <a:lstStyle/>
+          <a:p>
+            <a:pPr algn="ctr">
+              <a:defRPr sz="1275" b="1">
+                <a:solidFill>
+                  <a:srgbClr val="626E7E"/>
+                </a:solidFill>
+                <a:latin typeface="Consolas"/>
+                <a:ea typeface="Consolas"/>
+                <a:cs typeface="Consolas"/>
+              </a:defRPr>
+            </a:pPr>
+            <a:r>
+              <a:rPr sz="1275" b="1">
+                <a:solidFill>
+                  <a:srgbClr val="626E7E"/>
+                </a:solidFill>
+                <a:latin typeface="Times New Roman" panose="02020603050405020304" pitchFamily="18" charset="0"/>
+                <a:ea typeface="Consolas"/>
+                <a:cs typeface="Times New Roman" panose="02020603050405020304" pitchFamily="18" charset="0"/>
+              </a:rPr>
+              <a:t>&lt;/&gt;</a:t>
+            </a:r>
+          </a:p>
+        </p:txBody>
+      </p:sp>
+      <p:sp>
+        <p:nvSpPr>
+          <p:cNvPr id="276" name="MindSpore run text">
+            <a:extLst>
+              <a:ext uri="{FF2B5EF4-FFF2-40B4-BE49-F238E27FC236}">
+                <a16:creationId xmlns:a16="http://schemas.microsoft.com/office/drawing/2014/main" id="{D54E9745-0CCB-434F-A217-5ED94AC51AEF}"/>
+              </a:ext>
+            </a:extLst>
+          </p:cNvPr>
+          <p:cNvSpPr>
+            <a:spLocks noGrp="1"/>
+          </p:cNvSpPr>
+          <p:nvPr/>
+        </p:nvSpPr>
+        <p:spPr>
+          <a:xfrm>
+            <a:off x="13611225" y="2266950"/>
+            <a:ext cx="1276350" cy="266700"/>
+          </a:xfrm>
+          <a:prstGeom prst="rect">
+            <a:avLst/>
+          </a:prstGeom>
+          <a:noFill/>
+          <a:ln w="0">
             <a:noFill/>
-            <a:ln w="0">
-              <a:noFill/>
-            </a:ln>
-          </p:spPr>
-          <p:txBody>
-            <a:bodyPr wrap="none" lIns="0" tIns="0" rIns="0" bIns="0" anchor="t">
-              <a:noAutofit/>
-            </a:bodyPr>
-            <a:lstStyle/>
-            <a:p>
-              <a:pPr algn="l">
-                <a:defRPr sz="1575" b="0">
-                  <a:solidFill>
-                    <a:srgbClr val="09204B"/>
-                  </a:solidFill>
-                  <a:latin typeface="Arial Narrow"/>
-                  <a:ea typeface="Arial Narrow"/>
-                  <a:cs typeface="Arial Narrow"/>
-                </a:defRPr>
-              </a:pPr>
-              <a:r>
-                <a:rPr sz="1575" b="0">
-                  <a:solidFill>
-                    <a:srgbClr val="09204B"/>
-                  </a:solidFill>
-                  <a:latin typeface="Times New Roman" panose="02020603050405020304" pitchFamily="18" charset="0"/>
-                  <a:ea typeface="Arial Narrow"/>
-                  <a:cs typeface="Times New Roman" panose="02020603050405020304" pitchFamily="18" charset="0"/>
-                </a:rPr>
-                <a:t>Run &amp; Verify</a:t>
-              </a:r>
-            </a:p>
-          </p:txBody>
-        </p:sp>
-        <p:sp>
-          <p:nvSpPr>
-            <p:cNvPr id="277" name="MindSpore verified circle">
-              <a:extLst>
-                <a:ext uri="{FF2B5EF4-FFF2-40B4-BE49-F238E27FC236}">
-                  <a16:creationId xmlns:a16="http://schemas.microsoft.com/office/drawing/2014/main" id="{AE47E608-0EE5-4FE4-B621-8F26D4F40409}"/>
-                </a:ext>
-              </a:extLst>
-            </p:cNvPr>
-            <p:cNvSpPr>
-              <a:spLocks noGrp="1"/>
-            </p:cNvSpPr>
-            <p:nvPr/>
-          </p:nvSpPr>
-          <p:spPr>
-            <a:xfrm>
-              <a:off x="14906625" y="2057400"/>
-              <a:ext cx="485775" cy="485775"/>
-            </a:xfrm>
-            <a:prstGeom prst="ellipse">
-              <a:avLst/>
-            </a:prstGeom>
-            <a:gradFill>
-              <a:gsLst>
-                <a:gs pos="0">
-                  <a:srgbClr val="65BC6A"/>
-                </a:gs>
-                <a:gs pos="100000">
-                  <a:srgbClr val="40914F"/>
-                </a:gs>
-              </a:gsLst>
-              <a:lin ang="5400000"/>
-            </a:gradFill>
-            <a:ln w="10478">
-              <a:solidFill>
-                <a:srgbClr val="FFFFFF"/>
-              </a:solidFill>
-              <a:prstDash val="solid"/>
-            </a:ln>
-          </p:spPr>
-        </p:sp>
-        <p:sp>
-          <p:nvSpPr>
-            <p:cNvPr id="278" name="MindSpore verified tick">
-              <a:extLst>
-                <a:ext uri="{FF2B5EF4-FFF2-40B4-BE49-F238E27FC236}">
-                  <a16:creationId xmlns:a16="http://schemas.microsoft.com/office/drawing/2014/main" id="{E07FD45E-D41B-4ECA-A00C-953FE2488BE8}"/>
-                </a:ext>
-              </a:extLst>
-            </p:cNvPr>
-            <p:cNvSpPr>
-              <a:spLocks noGrp="1"/>
-            </p:cNvSpPr>
-            <p:nvPr/>
-          </p:nvSpPr>
-          <p:spPr>
-            <a:xfrm>
-              <a:off x="15042642" y="2227421"/>
-              <a:ext cx="223457" cy="155448"/>
-            </a:xfrm>
-            <a:custGeom>
-              <a:avLst/>
-              <a:gdLst/>
-              <a:ahLst/>
-              <a:cxnLst/>
-              <a:rect l="0" t="0" r="0" b="0"/>
-              <a:pathLst>
-                <a:path w="223457" h="155448">
-                  <a:moveTo>
-                    <a:pt x="0" y="82582"/>
-                  </a:moveTo>
-                  <a:lnTo>
-                    <a:pt x="77724" y="155448"/>
-                  </a:lnTo>
-                  <a:lnTo>
-                    <a:pt x="223457" y="0"/>
-                  </a:lnTo>
-                </a:path>
-              </a:pathLst>
-            </a:custGeom>
-            <a:noFill/>
-            <a:ln w="53435">
-              <a:solidFill>
-                <a:srgbClr val="FFFFFF"/>
-              </a:solidFill>
-            </a:ln>
-          </p:spPr>
-        </p:sp>
-      </p:grpSp>
-      <p:grpSp>
-        <p:nvGrpSpPr>
-          <p:cNvPr id="372" name="JAX framework"/>
-          <p:cNvGrpSpPr/>
+          </a:ln>
+        </p:spPr>
+        <p:txBody>
+          <a:bodyPr wrap="none" lIns="0" tIns="0" rIns="0" bIns="0" anchor="t">
+            <a:noAutofit/>
+          </a:bodyPr>
+          <a:lstStyle/>
+          <a:p>
+            <a:pPr algn="l">
+              <a:defRPr sz="1575" b="0">
+                <a:solidFill>
+                  <a:srgbClr val="09204B"/>
+                </a:solidFill>
+                <a:latin typeface="Arial Narrow"/>
+                <a:ea typeface="Arial Narrow"/>
+                <a:cs typeface="Arial Narrow"/>
+              </a:defRPr>
+            </a:pPr>
+            <a:r>
+              <a:rPr sz="1575" b="0">
+                <a:solidFill>
+                  <a:srgbClr val="09204B"/>
+                </a:solidFill>
+                <a:latin typeface="Times New Roman" panose="02020603050405020304" pitchFamily="18" charset="0"/>
+                <a:ea typeface="Arial Narrow"/>
+                <a:cs typeface="Times New Roman" panose="02020603050405020304" pitchFamily="18" charset="0"/>
+              </a:rPr>
+              <a:t>Run &amp; Verify</a:t>
+            </a:r>
+          </a:p>
+        </p:txBody>
+      </p:sp>
+      <p:sp>
+        <p:nvSpPr>
+          <p:cNvPr id="277" name="MindSpore verified circle">
+            <a:extLst>
+              <a:ext uri="{FF2B5EF4-FFF2-40B4-BE49-F238E27FC236}">
+                <a16:creationId xmlns:a16="http://schemas.microsoft.com/office/drawing/2014/main" id="{AE47E608-0EE5-4FE4-B621-8F26D4F40409}"/>
+              </a:ext>
+            </a:extLst>
+          </p:cNvPr>
+          <p:cNvSpPr>
+            <a:spLocks noGrp="1"/>
+          </p:cNvSpPr>
           <p:nvPr/>
-        </p:nvGrpSpPr>
-        <p:grpSpPr>
+        </p:nvSpPr>
+        <p:spPr>
+          <a:xfrm>
+            <a:off x="14906625" y="2057400"/>
+            <a:ext cx="485775" cy="485775"/>
+          </a:xfrm>
+          <a:prstGeom prst="ellipse">
+            <a:avLst/>
+          </a:prstGeom>
+          <a:gradFill>
+            <a:gsLst>
+              <a:gs pos="0">
+                <a:srgbClr val="65BC6A"/>
+              </a:gs>
+              <a:gs pos="100000">
+                <a:srgbClr val="40914F"/>
+              </a:gs>
+            </a:gsLst>
+            <a:lin ang="5400000"/>
+          </a:gradFill>
+          <a:ln w="10478">
+            <a:solidFill>
+              <a:srgbClr val="FFFFFF"/>
+            </a:solidFill>
+            <a:prstDash val="solid"/>
+          </a:ln>
+        </p:spPr>
+      </p:sp>
+      <p:sp>
+        <p:nvSpPr>
+          <p:cNvPr id="278" name="MindSpore verified tick">
+            <a:extLst>
+              <a:ext uri="{FF2B5EF4-FFF2-40B4-BE49-F238E27FC236}">
+                <a16:creationId xmlns:a16="http://schemas.microsoft.com/office/drawing/2014/main" id="{E07FD45E-D41B-4ECA-A00C-953FE2488BE8}"/>
+              </a:ext>
+            </a:extLst>
+          </p:cNvPr>
+          <p:cNvSpPr>
+            <a:spLocks noGrp="1"/>
+          </p:cNvSpPr>
+          <p:nvPr/>
+        </p:nvSpPr>
+        <p:spPr>
+          <a:xfrm>
+            <a:off x="15042642" y="2227421"/>
+            <a:ext cx="223457" cy="155448"/>
+          </a:xfrm>
+          <a:custGeom>
+            <a:avLst/>
+            <a:gdLst/>
+            <a:ahLst/>
+            <a:cxnLst/>
+            <a:rect l="0" t="0" r="0" b="0"/>
+            <a:pathLst>
+              <a:path w="223457" h="155448">
+                <a:moveTo>
+                  <a:pt x="0" y="82582"/>
+                </a:moveTo>
+                <a:lnTo>
+                  <a:pt x="77724" y="155448"/>
+                </a:lnTo>
+                <a:lnTo>
+                  <a:pt x="223457" y="0"/>
+                </a:lnTo>
+              </a:path>
+            </a:pathLst>
+          </a:custGeom>
+          <a:noFill/>
+          <a:ln w="53435">
+            <a:solidFill>
+              <a:srgbClr val="FFFFFF"/>
+            </a:solidFill>
+          </a:ln>
+        </p:spPr>
+      </p:sp>
+      <p:sp>
+        <p:nvSpPr>
+          <p:cNvPr id="279" name="JAX outer card">
+            <a:extLst>
+              <a:ext uri="{FF2B5EF4-FFF2-40B4-BE49-F238E27FC236}">
+                <a16:creationId xmlns:a16="http://schemas.microsoft.com/office/drawing/2014/main" id="{575C864E-6C4B-4315-920F-43AB5F087966}"/>
+              </a:ext>
+            </a:extLst>
+          </p:cNvPr>
+          <p:cNvSpPr>
+            <a:spLocks noGrp="1"/>
+          </p:cNvSpPr>
+          <p:nvPr/>
+        </p:nvSpPr>
+        <p:spPr>
           <a:xfrm>
             <a:off x="12725400" y="3009900"/>
             <a:ext cx="2924175" cy="1581150"/>
-            <a:chOff x="12725400" y="3009900"/>
-            <a:chExt cx="2924175" cy="1581150"/>
           </a:xfrm>
-        </p:grpSpPr>
-        <p:sp>
-          <p:nvSpPr>
-            <p:cNvPr id="279" name="JAX outer card">
-              <a:extLst>
-                <a:ext uri="{FF2B5EF4-FFF2-40B4-BE49-F238E27FC236}">
-                  <a16:creationId xmlns:a16="http://schemas.microsoft.com/office/drawing/2014/main" id="{575C864E-6C4B-4315-920F-43AB5F087966}"/>
-                </a:ext>
-              </a:extLst>
-            </p:cNvPr>
-            <p:cNvSpPr>
-              <a:spLocks noGrp="1"/>
-            </p:cNvSpPr>
-            <p:nvPr/>
-          </p:nvSpPr>
-          <p:spPr>
-            <a:xfrm>
-              <a:off x="12725400" y="3009900"/>
-              <a:ext cx="2924175" cy="1581150"/>
-            </a:xfrm>
-            <a:prstGeom prst="roundRect">
-              <a:avLst>
-                <a:gd name="adj" fmla="val 9036"/>
-              </a:avLst>
-            </a:prstGeom>
+          <a:prstGeom prst="roundRect">
+            <a:avLst>
+              <a:gd name="adj" fmla="val 9036"/>
+            </a:avLst>
+          </a:prstGeom>
+          <a:solidFill>
+            <a:srgbClr val="FCFEFF"/>
+          </a:solidFill>
+          <a:ln w="13335">
             <a:solidFill>
-              <a:srgbClr val="FCFEFF"/>
+              <a:srgbClr val="C6E1E5"/>
             </a:solidFill>
-            <a:ln w="13335">
-              <a:solidFill>
-                <a:srgbClr val="C6E1E5"/>
-              </a:solidFill>
-            </a:ln>
-          </p:spPr>
-        </p:sp>
-        <p:sp>
-          <p:nvSpPr>
-            <p:cNvPr id="280" name="JAX inner card">
-              <a:extLst>
-                <a:ext uri="{FF2B5EF4-FFF2-40B4-BE49-F238E27FC236}">
-                  <a16:creationId xmlns:a16="http://schemas.microsoft.com/office/drawing/2014/main" id="{BC0D58E0-432E-4141-8E01-156D21560FAD}"/>
-                </a:ext>
-              </a:extLst>
-            </p:cNvPr>
-            <p:cNvSpPr>
-              <a:spLocks noGrp="1"/>
-            </p:cNvSpPr>
-            <p:nvPr/>
-          </p:nvSpPr>
-          <p:spPr>
-            <a:xfrm>
-              <a:off x="12811125" y="3086100"/>
-              <a:ext cx="2743200" cy="1428750"/>
-            </a:xfrm>
-            <a:prstGeom prst="roundRect">
-              <a:avLst>
-                <a:gd name="adj" fmla="val 11333"/>
-              </a:avLst>
-            </a:prstGeom>
-            <a:gradFill>
-              <a:gsLst>
-                <a:gs pos="0">
-                  <a:srgbClr val="EEECFF"/>
-                </a:gs>
-                <a:gs pos="100000">
-                  <a:srgbClr val="E9E6FC"/>
-                </a:gs>
-              </a:gsLst>
-              <a:lin ang="5400000"/>
-            </a:gradFill>
-            <a:ln w="0">
-              <a:noFill/>
-            </a:ln>
-          </p:spPr>
-        </p:sp>
-        <p:pic>
-          <p:nvPicPr>
-            <p:cNvPr id="377" name="jax official logo" descr="https://raw.githubusercontent.com/google/jax/main/images/jax_logo.svg | Original SVG bytes; proportional crop of the official symbol."/>
-            <p:cNvPicPr>
-              <a:picLocks noChangeAspect="1"/>
-            </p:cNvPicPr>
-            <p:nvPr/>
-          </p:nvPicPr>
-          <p:blipFill>
-            <a:blip>
-              <a:extLst>
-                <a:ext uri="{96DAC541-7B7A-43D3-8B79-37D633B846F1}">
-                  <asvg:svgBlip xmlns:asvg="http://schemas.microsoft.com/office/drawing/2016/SVG/main" r:embed="rId5"/>
-                </a:ext>
-              </a:extLst>
-            </a:blip>
-            <a:srcRect/>
-            <a:stretch>
-              <a:fillRect/>
-            </a:stretch>
-          </p:blipFill>
-          <p:spPr>
-            <a:xfrm>
-              <a:off x="12982575" y="3371850"/>
-              <a:ext cx="781050" cy="451676"/>
-            </a:xfrm>
-            <a:prstGeom prst="rect">
-              <a:avLst/>
-            </a:prstGeom>
-          </p:spPr>
-        </p:pic>
-        <p:sp>
-          <p:nvSpPr>
-            <p:cNvPr id="319" name="JAX name">
-              <a:extLst>
-                <a:ext uri="{FF2B5EF4-FFF2-40B4-BE49-F238E27FC236}">
-                  <a16:creationId xmlns:a16="http://schemas.microsoft.com/office/drawing/2014/main" id="{11538DCA-3CBB-4AD5-847A-F1321C58577D}"/>
-                </a:ext>
-              </a:extLst>
-            </p:cNvPr>
-            <p:cNvSpPr>
-              <a:spLocks noGrp="1"/>
-            </p:cNvSpPr>
-            <p:nvPr/>
-          </p:nvSpPr>
-          <p:spPr>
-            <a:xfrm>
-              <a:off x="14001750" y="3238500"/>
-              <a:ext cx="1409700" cy="295275"/>
-            </a:xfrm>
-            <a:prstGeom prst="rect">
-              <a:avLst/>
-            </a:prstGeom>
+          </a:ln>
+        </p:spPr>
+      </p:sp>
+      <p:sp>
+        <p:nvSpPr>
+          <p:cNvPr id="280" name="JAX inner card">
+            <a:extLst>
+              <a:ext uri="{FF2B5EF4-FFF2-40B4-BE49-F238E27FC236}">
+                <a16:creationId xmlns:a16="http://schemas.microsoft.com/office/drawing/2014/main" id="{BC0D58E0-432E-4141-8E01-156D21560FAD}"/>
+              </a:ext>
+            </a:extLst>
+          </p:cNvPr>
+          <p:cNvSpPr>
+            <a:spLocks noGrp="1"/>
+          </p:cNvSpPr>
+          <p:nvPr/>
+        </p:nvSpPr>
+        <p:spPr>
+          <a:xfrm>
+            <a:off x="12811125" y="3086100"/>
+            <a:ext cx="2743200" cy="1428750"/>
+          </a:xfrm>
+          <a:prstGeom prst="roundRect">
+            <a:avLst>
+              <a:gd name="adj" fmla="val 11333"/>
+            </a:avLst>
+          </a:prstGeom>
+          <a:gradFill>
+            <a:gsLst>
+              <a:gs pos="0">
+                <a:srgbClr val="EEECFF"/>
+              </a:gs>
+              <a:gs pos="100000">
+                <a:srgbClr val="E9E6FC"/>
+              </a:gs>
+            </a:gsLst>
+            <a:lin ang="5400000"/>
+          </a:gradFill>
+          <a:ln w="0">
             <a:noFill/>
-            <a:ln w="0">
-              <a:noFill/>
-            </a:ln>
-          </p:spPr>
-          <p:txBody>
-            <a:bodyPr wrap="none" lIns="0" tIns="0" rIns="0" bIns="0" anchor="t">
-              <a:noAutofit/>
-            </a:bodyPr>
-            <a:lstStyle/>
-            <a:p>
-              <a:pPr algn="l">
-                <a:defRPr sz="2025" b="1">
-                  <a:solidFill>
-                    <a:srgbClr val="0B1534"/>
-                  </a:solidFill>
-                  <a:latin typeface="Arial Narrow"/>
-                  <a:ea typeface="Arial Narrow"/>
-                  <a:cs typeface="Arial Narrow"/>
-                </a:defRPr>
-              </a:pPr>
-              <a:r>
-                <a:rPr sz="2025" b="1">
-                  <a:solidFill>
-                    <a:srgbClr val="0B1534"/>
-                  </a:solidFill>
-                  <a:latin typeface="Times New Roman" panose="02020603050405020304" pitchFamily="18" charset="0"/>
-                  <a:ea typeface="Arial Narrow"/>
-                  <a:cs typeface="Times New Roman" panose="02020603050405020304" pitchFamily="18" charset="0"/>
-                </a:rPr>
-                <a:t>JAX</a:t>
-              </a:r>
-            </a:p>
-          </p:txBody>
-        </p:sp>
-        <p:sp>
-          <p:nvSpPr>
-            <p:cNvPr id="320" name="JAX adapter">
-              <a:extLst>
-                <a:ext uri="{FF2B5EF4-FFF2-40B4-BE49-F238E27FC236}">
-                  <a16:creationId xmlns:a16="http://schemas.microsoft.com/office/drawing/2014/main" id="{6BF94DA7-1C45-4311-8B5C-B70115D37635}"/>
-                </a:ext>
-              </a:extLst>
-            </p:cNvPr>
-            <p:cNvSpPr>
-              <a:spLocks noGrp="1"/>
-            </p:cNvSpPr>
-            <p:nvPr/>
-          </p:nvSpPr>
-          <p:spPr>
-            <a:xfrm>
-              <a:off x="14030325" y="3514725"/>
-              <a:ext cx="1524000" cy="276225"/>
-            </a:xfrm>
-            <a:prstGeom prst="rect">
-              <a:avLst/>
-            </a:prstGeom>
+          </a:ln>
+        </p:spPr>
+      </p:sp>
+      <p:pic>
+        <p:nvPicPr>
+          <p:cNvPr id="377" name="jax official logo" descr="https://raw.githubusercontent.com/google/jax/main/images/jax_logo.svg | Original SVG bytes; proportional crop of the official symbol."/>
+          <p:cNvPicPr>
+            <a:picLocks noChangeAspect="1"/>
+          </p:cNvPicPr>
+          <p:nvPr/>
+        </p:nvPicPr>
+        <p:blipFill>
+          <a:blip>
+            <a:extLst>
+              <a:ext uri="{96DAC541-7B7A-43D3-8B79-37D633B846F1}">
+                <asvg:svgBlip xmlns:asvg="http://schemas.microsoft.com/office/drawing/2016/SVG/main" r:embed="rId5"/>
+              </a:ext>
+            </a:extLst>
+          </a:blip>
+          <a:srcRect/>
+          <a:stretch>
+            <a:fillRect/>
+          </a:stretch>
+        </p:blipFill>
+        <p:spPr>
+          <a:xfrm>
+            <a:off x="12982575" y="3371850"/>
+            <a:ext cx="781050" cy="451676"/>
+          </a:xfrm>
+          <a:prstGeom prst="rect">
+            <a:avLst/>
+          </a:prstGeom>
+        </p:spPr>
+      </p:pic>
+      <p:sp>
+        <p:nvSpPr>
+          <p:cNvPr id="319" name="JAX name">
+            <a:extLst>
+              <a:ext uri="{FF2B5EF4-FFF2-40B4-BE49-F238E27FC236}">
+                <a16:creationId xmlns:a16="http://schemas.microsoft.com/office/drawing/2014/main" id="{11538DCA-3CBB-4AD5-847A-F1321C58577D}"/>
+              </a:ext>
+            </a:extLst>
+          </p:cNvPr>
+          <p:cNvSpPr>
+            <a:spLocks noGrp="1"/>
+          </p:cNvSpPr>
+          <p:nvPr/>
+        </p:nvSpPr>
+        <p:spPr>
+          <a:xfrm>
+            <a:off x="14001750" y="3238500"/>
+            <a:ext cx="1409700" cy="295275"/>
+          </a:xfrm>
+          <a:prstGeom prst="rect">
+            <a:avLst/>
+          </a:prstGeom>
+          <a:noFill/>
+          <a:ln w="0">
             <a:noFill/>
-            <a:ln w="0">
-              <a:noFill/>
-            </a:ln>
-          </p:spPr>
-          <p:txBody>
-            <a:bodyPr wrap="none" lIns="0" tIns="0" rIns="0" bIns="0" anchor="t">
-              <a:noAutofit/>
-            </a:bodyPr>
-            <a:lstStyle/>
-            <a:p>
-              <a:pPr algn="l">
-                <a:defRPr sz="1650" b="0">
-                  <a:solidFill>
-                    <a:srgbClr val="203570"/>
-                  </a:solidFill>
-                  <a:latin typeface="Arial Narrow"/>
-                  <a:ea typeface="Arial Narrow"/>
-                  <a:cs typeface="Arial Narrow"/>
-                </a:defRPr>
-              </a:pPr>
-              <a:r>
-                <a:rPr sz="1650" b="0">
-                  <a:solidFill>
-                    <a:srgbClr val="203570"/>
-                  </a:solidFill>
-                  <a:latin typeface="Times New Roman" panose="02020603050405020304" pitchFamily="18" charset="0"/>
-                  <a:ea typeface="Arial Narrow"/>
-                  <a:cs typeface="Times New Roman" panose="02020603050405020304" pitchFamily="18" charset="0"/>
-                </a:rPr>
-                <a:t>via TorchAX</a:t>
-              </a:r>
-            </a:p>
-          </p:txBody>
-        </p:sp>
-        <p:sp>
-          <p:nvSpPr>
-            <p:cNvPr id="321" name="JAX run strip">
-              <a:extLst>
-                <a:ext uri="{FF2B5EF4-FFF2-40B4-BE49-F238E27FC236}">
-                  <a16:creationId xmlns:a16="http://schemas.microsoft.com/office/drawing/2014/main" id="{FC19397C-60B5-41C4-A104-843C66CA3697}"/>
-                </a:ext>
-              </a:extLst>
-            </p:cNvPr>
-            <p:cNvSpPr>
-              <a:spLocks noGrp="1"/>
-            </p:cNvSpPr>
-            <p:nvPr/>
-          </p:nvSpPr>
-          <p:spPr>
-            <a:xfrm>
-              <a:off x="12954000" y="3971925"/>
-              <a:ext cx="2457450" cy="438150"/>
-            </a:xfrm>
-            <a:prstGeom prst="roundRect">
-              <a:avLst>
-                <a:gd name="adj" fmla="val 21739"/>
-              </a:avLst>
-            </a:prstGeom>
-            <a:gradFill>
-              <a:gsLst>
-                <a:gs pos="0">
-                  <a:srgbClr val="DFDDF8"/>
-                </a:gs>
-                <a:gs pos="100000">
-                  <a:srgbClr val="E0DCF7"/>
-                </a:gs>
-              </a:gsLst>
-              <a:lin ang="5400000"/>
-            </a:gradFill>
-            <a:ln w="0">
-              <a:noFill/>
-            </a:ln>
-          </p:spPr>
-        </p:sp>
-        <p:sp>
-          <p:nvSpPr>
-            <p:cNvPr id="322" name="JAX code button">
-              <a:extLst>
-                <a:ext uri="{FF2B5EF4-FFF2-40B4-BE49-F238E27FC236}">
-                  <a16:creationId xmlns:a16="http://schemas.microsoft.com/office/drawing/2014/main" id="{CDCF9260-0929-4705-8CAC-8A1B36A49948}"/>
-                </a:ext>
-              </a:extLst>
-            </p:cNvPr>
-            <p:cNvSpPr>
-              <a:spLocks noGrp="1"/>
-            </p:cNvSpPr>
-            <p:nvPr/>
-          </p:nvSpPr>
-          <p:spPr>
-            <a:xfrm>
-              <a:off x="13134975" y="4067175"/>
-              <a:ext cx="285750" cy="276225"/>
-            </a:xfrm>
-            <a:prstGeom prst="roundRect">
-              <a:avLst>
-                <a:gd name="adj" fmla="val 17241"/>
-              </a:avLst>
-            </a:prstGeom>
+          </a:ln>
+        </p:spPr>
+        <p:txBody>
+          <a:bodyPr wrap="none" lIns="0" tIns="0" rIns="0" bIns="0" anchor="t">
+            <a:noAutofit/>
+          </a:bodyPr>
+          <a:lstStyle/>
+          <a:p>
+            <a:pPr algn="l">
+              <a:defRPr sz="2025" b="1">
+                <a:solidFill>
+                  <a:srgbClr val="0B1534"/>
+                </a:solidFill>
+                <a:latin typeface="Arial Narrow"/>
+                <a:ea typeface="Arial Narrow"/>
+                <a:cs typeface="Arial Narrow"/>
+              </a:defRPr>
+            </a:pPr>
+            <a:r>
+              <a:rPr sz="2025" b="1">
+                <a:solidFill>
+                  <a:srgbClr val="0B1534"/>
+                </a:solidFill>
+                <a:latin typeface="Times New Roman" panose="02020603050405020304" pitchFamily="18" charset="0"/>
+                <a:ea typeface="Arial Narrow"/>
+                <a:cs typeface="Times New Roman" panose="02020603050405020304" pitchFamily="18" charset="0"/>
+              </a:rPr>
+              <a:t>JAX</a:t>
+            </a:r>
+          </a:p>
+        </p:txBody>
+      </p:sp>
+      <p:sp>
+        <p:nvSpPr>
+          <p:cNvPr id="320" name="JAX adapter">
+            <a:extLst>
+              <a:ext uri="{FF2B5EF4-FFF2-40B4-BE49-F238E27FC236}">
+                <a16:creationId xmlns:a16="http://schemas.microsoft.com/office/drawing/2014/main" id="{6BF94DA7-1C45-4311-8B5C-B70115D37635}"/>
+              </a:ext>
+            </a:extLst>
+          </p:cNvPr>
+          <p:cNvSpPr>
+            <a:spLocks noGrp="1"/>
+          </p:cNvSpPr>
+          <p:nvPr/>
+        </p:nvSpPr>
+        <p:spPr>
+          <a:xfrm>
+            <a:off x="14030325" y="3514725"/>
+            <a:ext cx="1524000" cy="276225"/>
+          </a:xfrm>
+          <a:prstGeom prst="rect">
+            <a:avLst/>
+          </a:prstGeom>
+          <a:noFill/>
+          <a:ln w="0">
+            <a:noFill/>
+          </a:ln>
+        </p:spPr>
+        <p:txBody>
+          <a:bodyPr wrap="none" lIns="0" tIns="0" rIns="0" bIns="0" anchor="t">
+            <a:noAutofit/>
+          </a:bodyPr>
+          <a:lstStyle/>
+          <a:p>
+            <a:pPr algn="l">
+              <a:defRPr sz="1650" b="0">
+                <a:solidFill>
+                  <a:srgbClr val="203570"/>
+                </a:solidFill>
+                <a:latin typeface="Arial Narrow"/>
+                <a:ea typeface="Arial Narrow"/>
+                <a:cs typeface="Arial Narrow"/>
+              </a:defRPr>
+            </a:pPr>
+            <a:r>
+              <a:rPr sz="1650" b="0">
+                <a:solidFill>
+                  <a:srgbClr val="203570"/>
+                </a:solidFill>
+                <a:latin typeface="Times New Roman" panose="02020603050405020304" pitchFamily="18" charset="0"/>
+                <a:ea typeface="Arial Narrow"/>
+                <a:cs typeface="Times New Roman" panose="02020603050405020304" pitchFamily="18" charset="0"/>
+              </a:rPr>
+              <a:t>via TorchAX</a:t>
+            </a:r>
+          </a:p>
+        </p:txBody>
+      </p:sp>
+      <p:sp>
+        <p:nvSpPr>
+          <p:cNvPr id="321" name="JAX run strip">
+            <a:extLst>
+              <a:ext uri="{FF2B5EF4-FFF2-40B4-BE49-F238E27FC236}">
+                <a16:creationId xmlns:a16="http://schemas.microsoft.com/office/drawing/2014/main" id="{FC19397C-60B5-41C4-A104-843C66CA3697}"/>
+              </a:ext>
+            </a:extLst>
+          </p:cNvPr>
+          <p:cNvSpPr>
+            <a:spLocks noGrp="1"/>
+          </p:cNvSpPr>
+          <p:nvPr/>
+        </p:nvSpPr>
+        <p:spPr>
+          <a:xfrm>
+            <a:off x="12954000" y="3971925"/>
+            <a:ext cx="2457450" cy="438150"/>
+          </a:xfrm>
+          <a:prstGeom prst="roundRect">
+            <a:avLst>
+              <a:gd name="adj" fmla="val 21739"/>
+            </a:avLst>
+          </a:prstGeom>
+          <a:gradFill>
+            <a:gsLst>
+              <a:gs pos="0">
+                <a:srgbClr val="DFDDF8"/>
+              </a:gs>
+              <a:gs pos="100000">
+                <a:srgbClr val="E0DCF7"/>
+              </a:gs>
+            </a:gsLst>
+            <a:lin ang="5400000"/>
+          </a:gradFill>
+          <a:ln w="0">
+            <a:noFill/>
+          </a:ln>
+        </p:spPr>
+      </p:sp>
+      <p:sp>
+        <p:nvSpPr>
+          <p:cNvPr id="322" name="JAX code button">
+            <a:extLst>
+              <a:ext uri="{FF2B5EF4-FFF2-40B4-BE49-F238E27FC236}">
+                <a16:creationId xmlns:a16="http://schemas.microsoft.com/office/drawing/2014/main" id="{CDCF9260-0929-4705-8CAC-8A1B36A49948}"/>
+              </a:ext>
+            </a:extLst>
+          </p:cNvPr>
+          <p:cNvSpPr>
+            <a:spLocks noGrp="1"/>
+          </p:cNvSpPr>
+          <p:nvPr/>
+        </p:nvSpPr>
+        <p:spPr>
+          <a:xfrm>
+            <a:off x="13134975" y="4067175"/>
+            <a:ext cx="285750" cy="276225"/>
+          </a:xfrm>
+          <a:prstGeom prst="roundRect">
+            <a:avLst>
+              <a:gd name="adj" fmla="val 17241"/>
+            </a:avLst>
+          </a:prstGeom>
+          <a:solidFill>
+            <a:srgbClr val="F0EFF8"/>
+          </a:solidFill>
+          <a:ln w="13335">
             <a:solidFill>
-              <a:srgbClr val="F0EFF8"/>
+              <a:srgbClr val="9293AA"/>
             </a:solidFill>
-            <a:ln w="13335">
-              <a:solidFill>
-                <a:srgbClr val="9293AA"/>
-              </a:solidFill>
-            </a:ln>
-          </p:spPr>
-        </p:sp>
-        <p:sp>
-          <p:nvSpPr>
-            <p:cNvPr id="323" name="JAX run code glyph">
-              <a:extLst>
-                <a:ext uri="{FF2B5EF4-FFF2-40B4-BE49-F238E27FC236}">
-                  <a16:creationId xmlns:a16="http://schemas.microsoft.com/office/drawing/2014/main" id="{523AF5C8-0907-4E0C-94E0-3174699DA5B6}"/>
-                </a:ext>
-              </a:extLst>
-            </p:cNvPr>
-            <p:cNvSpPr>
-              <a:spLocks noGrp="1"/>
-            </p:cNvSpPr>
-            <p:nvPr/>
-          </p:nvSpPr>
-          <p:spPr>
-            <a:xfrm>
-              <a:off x="13154025" y="4086225"/>
-              <a:ext cx="257175" cy="219075"/>
-            </a:xfrm>
-            <a:prstGeom prst="rect">
-              <a:avLst/>
-            </a:prstGeom>
+          </a:ln>
+        </p:spPr>
+      </p:sp>
+      <p:sp>
+        <p:nvSpPr>
+          <p:cNvPr id="323" name="JAX run code glyph">
+            <a:extLst>
+              <a:ext uri="{FF2B5EF4-FFF2-40B4-BE49-F238E27FC236}">
+                <a16:creationId xmlns:a16="http://schemas.microsoft.com/office/drawing/2014/main" id="{523AF5C8-0907-4E0C-94E0-3174699DA5B6}"/>
+              </a:ext>
+            </a:extLst>
+          </p:cNvPr>
+          <p:cNvSpPr>
+            <a:spLocks noGrp="1"/>
+          </p:cNvSpPr>
+          <p:nvPr/>
+        </p:nvSpPr>
+        <p:spPr>
+          <a:xfrm>
+            <a:off x="13154025" y="4086225"/>
+            <a:ext cx="257175" cy="219075"/>
+          </a:xfrm>
+          <a:prstGeom prst="rect">
+            <a:avLst/>
+          </a:prstGeom>
+          <a:noFill/>
+          <a:ln w="0">
             <a:noFill/>
-            <a:ln w="0">
-              <a:noFill/>
-            </a:ln>
-          </p:spPr>
-          <p:txBody>
-            <a:bodyPr wrap="none" lIns="0" tIns="0" rIns="0" bIns="0" anchor="t">
-              <a:noAutofit/>
-            </a:bodyPr>
-            <a:lstStyle/>
-            <a:p>
-              <a:pPr algn="ctr">
-                <a:defRPr sz="1275" b="1">
-                  <a:solidFill>
-                    <a:srgbClr val="666B80"/>
-                  </a:solidFill>
-                  <a:latin typeface="Consolas"/>
-                  <a:ea typeface="Consolas"/>
-                  <a:cs typeface="Consolas"/>
-                </a:defRPr>
-              </a:pPr>
-              <a:r>
-                <a:rPr sz="1275" b="1">
-                  <a:solidFill>
-                    <a:srgbClr val="666B80"/>
-                  </a:solidFill>
-                  <a:latin typeface="Times New Roman" panose="02020603050405020304" pitchFamily="18" charset="0"/>
-                  <a:ea typeface="Consolas"/>
-                  <a:cs typeface="Times New Roman" panose="02020603050405020304" pitchFamily="18" charset="0"/>
-                </a:rPr>
-                <a:t>&lt;/&gt;</a:t>
-              </a:r>
-            </a:p>
-          </p:txBody>
-        </p:sp>
-        <p:sp>
-          <p:nvSpPr>
-            <p:cNvPr id="324" name="JAX run text">
-              <a:extLst>
-                <a:ext uri="{FF2B5EF4-FFF2-40B4-BE49-F238E27FC236}">
-                  <a16:creationId xmlns:a16="http://schemas.microsoft.com/office/drawing/2014/main" id="{6CBCCE78-8E76-4BDB-8CEF-77473D5B0BA6}"/>
-                </a:ext>
-              </a:extLst>
-            </p:cNvPr>
-            <p:cNvSpPr>
-              <a:spLocks noGrp="1"/>
-            </p:cNvSpPr>
-            <p:nvPr/>
-          </p:nvSpPr>
-          <p:spPr>
-            <a:xfrm>
-              <a:off x="13611225" y="4086225"/>
-              <a:ext cx="1276350" cy="266700"/>
-            </a:xfrm>
-            <a:prstGeom prst="rect">
-              <a:avLst/>
-            </a:prstGeom>
+          </a:ln>
+        </p:spPr>
+        <p:txBody>
+          <a:bodyPr wrap="none" lIns="0" tIns="0" rIns="0" bIns="0" anchor="t">
+            <a:noAutofit/>
+          </a:bodyPr>
+          <a:lstStyle/>
+          <a:p>
+            <a:pPr algn="ctr">
+              <a:defRPr sz="1275" b="1">
+                <a:solidFill>
+                  <a:srgbClr val="666B80"/>
+                </a:solidFill>
+                <a:latin typeface="Consolas"/>
+                <a:ea typeface="Consolas"/>
+                <a:cs typeface="Consolas"/>
+              </a:defRPr>
+            </a:pPr>
+            <a:r>
+              <a:rPr sz="1275" b="1">
+                <a:solidFill>
+                  <a:srgbClr val="666B80"/>
+                </a:solidFill>
+                <a:latin typeface="Times New Roman" panose="02020603050405020304" pitchFamily="18" charset="0"/>
+                <a:ea typeface="Consolas"/>
+                <a:cs typeface="Times New Roman" panose="02020603050405020304" pitchFamily="18" charset="0"/>
+              </a:rPr>
+              <a:t>&lt;/&gt;</a:t>
+            </a:r>
+          </a:p>
+        </p:txBody>
+      </p:sp>
+      <p:sp>
+        <p:nvSpPr>
+          <p:cNvPr id="324" name="JAX run text">
+            <a:extLst>
+              <a:ext uri="{FF2B5EF4-FFF2-40B4-BE49-F238E27FC236}">
+                <a16:creationId xmlns:a16="http://schemas.microsoft.com/office/drawing/2014/main" id="{6CBCCE78-8E76-4BDB-8CEF-77473D5B0BA6}"/>
+              </a:ext>
+            </a:extLst>
+          </p:cNvPr>
+          <p:cNvSpPr>
+            <a:spLocks noGrp="1"/>
+          </p:cNvSpPr>
+          <p:nvPr/>
+        </p:nvSpPr>
+        <p:spPr>
+          <a:xfrm>
+            <a:off x="13611225" y="4086225"/>
+            <a:ext cx="1276350" cy="266700"/>
+          </a:xfrm>
+          <a:prstGeom prst="rect">
+            <a:avLst/>
+          </a:prstGeom>
+          <a:noFill/>
+          <a:ln w="0">
             <a:noFill/>
-            <a:ln w="0">
-              <a:noFill/>
-            </a:ln>
-          </p:spPr>
-          <p:txBody>
-            <a:bodyPr wrap="none" lIns="0" tIns="0" rIns="0" bIns="0" anchor="t">
-              <a:noAutofit/>
-            </a:bodyPr>
-            <a:lstStyle/>
-            <a:p>
-              <a:pPr algn="l">
-                <a:defRPr sz="1575" b="0">
-                  <a:solidFill>
-                    <a:srgbClr val="09204B"/>
-                  </a:solidFill>
-                  <a:latin typeface="Arial Narrow"/>
-                  <a:ea typeface="Arial Narrow"/>
-                  <a:cs typeface="Arial Narrow"/>
-                </a:defRPr>
-              </a:pPr>
-              <a:r>
-                <a:rPr sz="1575" b="0">
-                  <a:solidFill>
-                    <a:srgbClr val="09204B"/>
-                  </a:solidFill>
-                  <a:latin typeface="Times New Roman" panose="02020603050405020304" pitchFamily="18" charset="0"/>
-                  <a:ea typeface="Arial Narrow"/>
-                  <a:cs typeface="Times New Roman" panose="02020603050405020304" pitchFamily="18" charset="0"/>
-                </a:rPr>
-                <a:t>Run &amp; Verify</a:t>
-              </a:r>
-            </a:p>
-          </p:txBody>
-        </p:sp>
-        <p:sp>
-          <p:nvSpPr>
-            <p:cNvPr id="325" name="JAX verified circle">
-              <a:extLst>
-                <a:ext uri="{FF2B5EF4-FFF2-40B4-BE49-F238E27FC236}">
-                  <a16:creationId xmlns:a16="http://schemas.microsoft.com/office/drawing/2014/main" id="{30748494-01BE-46CD-9F1B-C6E341B10C40}"/>
-                </a:ext>
-              </a:extLst>
-            </p:cNvPr>
-            <p:cNvSpPr>
-              <a:spLocks noGrp="1"/>
-            </p:cNvSpPr>
-            <p:nvPr/>
-          </p:nvSpPr>
-          <p:spPr>
-            <a:xfrm>
-              <a:off x="14906625" y="3857625"/>
-              <a:ext cx="485775" cy="485775"/>
-            </a:xfrm>
-            <a:prstGeom prst="ellipse">
-              <a:avLst/>
-            </a:prstGeom>
-            <a:gradFill>
-              <a:gsLst>
-                <a:gs pos="0">
-                  <a:srgbClr val="65BC6A"/>
-                </a:gs>
-                <a:gs pos="100000">
-                  <a:srgbClr val="40914F"/>
-                </a:gs>
-              </a:gsLst>
-              <a:lin ang="5400000"/>
-            </a:gradFill>
-            <a:ln w="10478">
-              <a:solidFill>
-                <a:srgbClr val="FFFFFF"/>
-              </a:solidFill>
-              <a:prstDash val="solid"/>
-            </a:ln>
-          </p:spPr>
-        </p:sp>
-        <p:sp>
-          <p:nvSpPr>
-            <p:cNvPr id="326" name="JAX verified tick">
-              <a:extLst>
-                <a:ext uri="{FF2B5EF4-FFF2-40B4-BE49-F238E27FC236}">
-                  <a16:creationId xmlns:a16="http://schemas.microsoft.com/office/drawing/2014/main" id="{5E8FA185-C09E-4C81-97CC-74116FC3AE41}"/>
-                </a:ext>
-              </a:extLst>
-            </p:cNvPr>
-            <p:cNvSpPr>
-              <a:spLocks noGrp="1"/>
-            </p:cNvSpPr>
-            <p:nvPr/>
-          </p:nvSpPr>
-          <p:spPr>
-            <a:xfrm>
-              <a:off x="15042642" y="4027646"/>
-              <a:ext cx="223457" cy="155448"/>
-            </a:xfrm>
-            <a:custGeom>
-              <a:avLst/>
-              <a:gdLst/>
-              <a:ahLst/>
-              <a:cxnLst/>
-              <a:rect l="0" t="0" r="0" b="0"/>
-              <a:pathLst>
-                <a:path w="223457" h="155448">
-                  <a:moveTo>
-                    <a:pt x="0" y="82582"/>
-                  </a:moveTo>
-                  <a:lnTo>
-                    <a:pt x="77724" y="155448"/>
-                  </a:lnTo>
-                  <a:lnTo>
-                    <a:pt x="223457" y="0"/>
-                  </a:lnTo>
-                </a:path>
-              </a:pathLst>
-            </a:custGeom>
-            <a:noFill/>
-            <a:ln w="53435">
-              <a:solidFill>
-                <a:srgbClr val="FFFFFF"/>
-              </a:solidFill>
-            </a:ln>
-          </p:spPr>
-        </p:sp>
-      </p:grpSp>
+          </a:ln>
+        </p:spPr>
+        <p:txBody>
+          <a:bodyPr wrap="none" lIns="0" tIns="0" rIns="0" bIns="0" anchor="t">
+            <a:noAutofit/>
+          </a:bodyPr>
+          <a:lstStyle/>
+          <a:p>
+            <a:pPr algn="l">
+              <a:defRPr sz="1575" b="0">
+                <a:solidFill>
+                  <a:srgbClr val="09204B"/>
+                </a:solidFill>
+                <a:latin typeface="Arial Narrow"/>
+                <a:ea typeface="Arial Narrow"/>
+                <a:cs typeface="Arial Narrow"/>
+              </a:defRPr>
+            </a:pPr>
+            <a:r>
+              <a:rPr sz="1575" b="0">
+                <a:solidFill>
+                  <a:srgbClr val="09204B"/>
+                </a:solidFill>
+                <a:latin typeface="Times New Roman" panose="02020603050405020304" pitchFamily="18" charset="0"/>
+                <a:ea typeface="Arial Narrow"/>
+                <a:cs typeface="Times New Roman" panose="02020603050405020304" pitchFamily="18" charset="0"/>
+              </a:rPr>
+              <a:t>Run &amp; Verify</a:t>
+            </a:r>
+          </a:p>
+        </p:txBody>
+      </p:sp>
+      <p:sp>
+        <p:nvSpPr>
+          <p:cNvPr id="325" name="JAX verified circle">
+            <a:extLst>
+              <a:ext uri="{FF2B5EF4-FFF2-40B4-BE49-F238E27FC236}">
+                <a16:creationId xmlns:a16="http://schemas.microsoft.com/office/drawing/2014/main" id="{30748494-01BE-46CD-9F1B-C6E341B10C40}"/>
+              </a:ext>
+            </a:extLst>
+          </p:cNvPr>
+          <p:cNvSpPr>
+            <a:spLocks noGrp="1"/>
+          </p:cNvSpPr>
+          <p:nvPr/>
+        </p:nvSpPr>
+        <p:spPr>
+          <a:xfrm>
+            <a:off x="14906625" y="3857625"/>
+            <a:ext cx="485775" cy="485775"/>
+          </a:xfrm>
+          <a:prstGeom prst="ellipse">
+            <a:avLst/>
+          </a:prstGeom>
+          <a:gradFill>
+            <a:gsLst>
+              <a:gs pos="0">
+                <a:srgbClr val="65BC6A"/>
+              </a:gs>
+              <a:gs pos="100000">
+                <a:srgbClr val="40914F"/>
+              </a:gs>
+            </a:gsLst>
+            <a:lin ang="5400000"/>
+          </a:gradFill>
+          <a:ln w="10478">
+            <a:solidFill>
+              <a:srgbClr val="FFFFFF"/>
+            </a:solidFill>
+            <a:prstDash val="solid"/>
+          </a:ln>
+        </p:spPr>
+      </p:sp>
+      <p:sp>
+        <p:nvSpPr>
+          <p:cNvPr id="326" name="JAX verified tick">
+            <a:extLst>
+              <a:ext uri="{FF2B5EF4-FFF2-40B4-BE49-F238E27FC236}">
+                <a16:creationId xmlns:a16="http://schemas.microsoft.com/office/drawing/2014/main" id="{5E8FA185-C09E-4C81-97CC-74116FC3AE41}"/>
+              </a:ext>
+            </a:extLst>
+          </p:cNvPr>
+          <p:cNvSpPr>
+            <a:spLocks noGrp="1"/>
+          </p:cNvSpPr>
+          <p:nvPr/>
+        </p:nvSpPr>
+        <p:spPr>
+          <a:xfrm>
+            <a:off x="15042642" y="4027646"/>
+            <a:ext cx="223457" cy="155448"/>
+          </a:xfrm>
+          <a:custGeom>
+            <a:avLst/>
+            <a:gdLst/>
+            <a:ahLst/>
+            <a:cxnLst/>
+            <a:rect l="0" t="0" r="0" b="0"/>
+            <a:pathLst>
+              <a:path w="223457" h="155448">
+                <a:moveTo>
+                  <a:pt x="0" y="82582"/>
+                </a:moveTo>
+                <a:lnTo>
+                  <a:pt x="77724" y="155448"/>
+                </a:lnTo>
+                <a:lnTo>
+                  <a:pt x="223457" y="0"/>
+                </a:lnTo>
+              </a:path>
+            </a:pathLst>
+          </a:custGeom>
+          <a:noFill/>
+          <a:ln w="53435">
+            <a:solidFill>
+              <a:srgbClr val="FFFFFF"/>
+            </a:solidFill>
+          </a:ln>
+        </p:spPr>
+      </p:sp>
       <p:grpSp>
         <p:nvGrpSpPr>
           <p:cNvPr id="373" name="More frameworks"/>
